--- a/processo.pptx
+++ b/processo.pptx
@@ -6,7 +6,8 @@
   </p:sldMasterIdLst>
   <p:sldIdLst>
     <p:sldId id="256" r:id="rId2"/>
-    <p:sldId id="257" r:id="rId3"/>
+    <p:sldId id="258" r:id="rId3"/>
+    <p:sldId id="257" r:id="rId4"/>
   </p:sldIdLst>
   <p:sldSz cx="12192000" cy="6858000"/>
   <p:notesSz cx="6858000" cy="9144000"/>
@@ -260,7 +261,7 @@
           <a:p>
             <a:fld id="{7B423683-9919-4DCC-881B-197980B1E2E2}" type="datetimeFigureOut">
               <a:rPr lang="it-IT" smtClean="0"/>
-              <a:t>31/03/2026</a:t>
+              <a:t>24/05/2026</a:t>
             </a:fld>
             <a:endParaRPr lang="it-IT"/>
           </a:p>
@@ -458,7 +459,7 @@
           <a:p>
             <a:fld id="{7B423683-9919-4DCC-881B-197980B1E2E2}" type="datetimeFigureOut">
               <a:rPr lang="it-IT" smtClean="0"/>
-              <a:t>31/03/2026</a:t>
+              <a:t>24/05/2026</a:t>
             </a:fld>
             <a:endParaRPr lang="it-IT"/>
           </a:p>
@@ -666,7 +667,7 @@
           <a:p>
             <a:fld id="{7B423683-9919-4DCC-881B-197980B1E2E2}" type="datetimeFigureOut">
               <a:rPr lang="it-IT" smtClean="0"/>
-              <a:t>31/03/2026</a:t>
+              <a:t>24/05/2026</a:t>
             </a:fld>
             <a:endParaRPr lang="it-IT"/>
           </a:p>
@@ -864,7 +865,7 @@
           <a:p>
             <a:fld id="{7B423683-9919-4DCC-881B-197980B1E2E2}" type="datetimeFigureOut">
               <a:rPr lang="it-IT" smtClean="0"/>
-              <a:t>31/03/2026</a:t>
+              <a:t>24/05/2026</a:t>
             </a:fld>
             <a:endParaRPr lang="it-IT"/>
           </a:p>
@@ -1139,7 +1140,7 @@
           <a:p>
             <a:fld id="{7B423683-9919-4DCC-881B-197980B1E2E2}" type="datetimeFigureOut">
               <a:rPr lang="it-IT" smtClean="0"/>
-              <a:t>31/03/2026</a:t>
+              <a:t>24/05/2026</a:t>
             </a:fld>
             <a:endParaRPr lang="it-IT"/>
           </a:p>
@@ -1404,7 +1405,7 @@
           <a:p>
             <a:fld id="{7B423683-9919-4DCC-881B-197980B1E2E2}" type="datetimeFigureOut">
               <a:rPr lang="it-IT" smtClean="0"/>
-              <a:t>31/03/2026</a:t>
+              <a:t>24/05/2026</a:t>
             </a:fld>
             <a:endParaRPr lang="it-IT"/>
           </a:p>
@@ -1816,7 +1817,7 @@
           <a:p>
             <a:fld id="{7B423683-9919-4DCC-881B-197980B1E2E2}" type="datetimeFigureOut">
               <a:rPr lang="it-IT" smtClean="0"/>
-              <a:t>31/03/2026</a:t>
+              <a:t>24/05/2026</a:t>
             </a:fld>
             <a:endParaRPr lang="it-IT"/>
           </a:p>
@@ -1957,7 +1958,7 @@
           <a:p>
             <a:fld id="{7B423683-9919-4DCC-881B-197980B1E2E2}" type="datetimeFigureOut">
               <a:rPr lang="it-IT" smtClean="0"/>
-              <a:t>31/03/2026</a:t>
+              <a:t>24/05/2026</a:t>
             </a:fld>
             <a:endParaRPr lang="it-IT"/>
           </a:p>
@@ -2070,7 +2071,7 @@
           <a:p>
             <a:fld id="{7B423683-9919-4DCC-881B-197980B1E2E2}" type="datetimeFigureOut">
               <a:rPr lang="it-IT" smtClean="0"/>
-              <a:t>31/03/2026</a:t>
+              <a:t>24/05/2026</a:t>
             </a:fld>
             <a:endParaRPr lang="it-IT"/>
           </a:p>
@@ -2381,7 +2382,7 @@
           <a:p>
             <a:fld id="{7B423683-9919-4DCC-881B-197980B1E2E2}" type="datetimeFigureOut">
               <a:rPr lang="it-IT" smtClean="0"/>
-              <a:t>31/03/2026</a:t>
+              <a:t>24/05/2026</a:t>
             </a:fld>
             <a:endParaRPr lang="it-IT"/>
           </a:p>
@@ -2669,7 +2670,7 @@
           <a:p>
             <a:fld id="{7B423683-9919-4DCC-881B-197980B1E2E2}" type="datetimeFigureOut">
               <a:rPr lang="it-IT" smtClean="0"/>
-              <a:t>31/03/2026</a:t>
+              <a:t>24/05/2026</a:t>
             </a:fld>
             <a:endParaRPr lang="it-IT"/>
           </a:p>
@@ -2910,7 +2911,7 @@
           <a:p>
             <a:fld id="{7B423683-9919-4DCC-881B-197980B1E2E2}" type="datetimeFigureOut">
               <a:rPr lang="it-IT" smtClean="0"/>
-              <a:t>31/03/2026</a:t>
+              <a:t>24/05/2026</a:t>
             </a:fld>
             <a:endParaRPr lang="it-IT"/>
           </a:p>
@@ -3968,6 +3969,462 @@
 </file>
 
 <file path=ppt/slides/slide2.xml><?xml version="1.0" encoding="utf-8"?>
+<p:sld xmlns:a="http://schemas.openxmlformats.org/drawingml/2006/main" xmlns:r="http://schemas.openxmlformats.org/officeDocument/2006/relationships" xmlns:p="http://schemas.openxmlformats.org/presentationml/2006/main">
+  <p:cSld>
+    <p:spTree>
+      <p:nvGrpSpPr>
+        <p:cNvPr id="1" name="">
+          <a:extLst>
+            <a:ext uri="{FF2B5EF4-FFF2-40B4-BE49-F238E27FC236}">
+              <a16:creationId xmlns:a16="http://schemas.microsoft.com/office/drawing/2014/main" id="{28BD17AB-D6BF-B1A8-E4EC-2ECBCEEDA8C5}"/>
+            </a:ext>
+          </a:extLst>
+        </p:cNvPr>
+        <p:cNvGrpSpPr/>
+        <p:nvPr/>
+      </p:nvGrpSpPr>
+      <p:grpSpPr>
+        <a:xfrm>
+          <a:off x="0" y="0"/>
+          <a:ext cx="0" cy="0"/>
+          <a:chOff x="0" y="0"/>
+          <a:chExt cx="0" cy="0"/>
+        </a:xfrm>
+      </p:grpSpPr>
+      <p:sp>
+        <p:nvSpPr>
+          <p:cNvPr id="5" name="Rettangolo 4">
+            <a:extLst>
+              <a:ext uri="{FF2B5EF4-FFF2-40B4-BE49-F238E27FC236}">
+                <a16:creationId xmlns:a16="http://schemas.microsoft.com/office/drawing/2014/main" id="{39EB44C2-DA55-F36D-9DE4-310BC29915C0}"/>
+              </a:ext>
+            </a:extLst>
+          </p:cNvPr>
+          <p:cNvSpPr/>
+          <p:nvPr/>
+        </p:nvSpPr>
+        <p:spPr>
+          <a:xfrm>
+            <a:off x="5359289" y="2560323"/>
+            <a:ext cx="1778727" cy="1025718"/>
+          </a:xfrm>
+          <a:prstGeom prst="rect">
+            <a:avLst/>
+          </a:prstGeom>
+        </p:spPr>
+        <p:style>
+          <a:lnRef idx="1">
+            <a:schemeClr val="accent2"/>
+          </a:lnRef>
+          <a:fillRef idx="2">
+            <a:schemeClr val="accent2"/>
+          </a:fillRef>
+          <a:effectRef idx="1">
+            <a:schemeClr val="accent2"/>
+          </a:effectRef>
+          <a:fontRef idx="minor">
+            <a:schemeClr val="dk1"/>
+          </a:fontRef>
+        </p:style>
+        <p:txBody>
+          <a:bodyPr rtlCol="0" anchor="ctr"/>
+          <a:lstStyle/>
+          <a:p>
+            <a:pPr algn="ctr"/>
+            <a:r>
+              <a:rPr lang="it-IT" dirty="0"/>
+              <a:t>Quantizzazione FP16</a:t>
+            </a:r>
+          </a:p>
+        </p:txBody>
+      </p:sp>
+      <p:sp>
+        <p:nvSpPr>
+          <p:cNvPr id="6" name="Rettangolo 5">
+            <a:extLst>
+              <a:ext uri="{FF2B5EF4-FFF2-40B4-BE49-F238E27FC236}">
+                <a16:creationId xmlns:a16="http://schemas.microsoft.com/office/drawing/2014/main" id="{1FA9BC0A-3FD2-B1BF-05AD-0411F2329BBD}"/>
+              </a:ext>
+            </a:extLst>
+          </p:cNvPr>
+          <p:cNvSpPr/>
+          <p:nvPr/>
+        </p:nvSpPr>
+        <p:spPr>
+          <a:xfrm>
+            <a:off x="8057071" y="2560323"/>
+            <a:ext cx="1218515" cy="1025718"/>
+          </a:xfrm>
+          <a:prstGeom prst="rect">
+            <a:avLst/>
+          </a:prstGeom>
+        </p:spPr>
+        <p:style>
+          <a:lnRef idx="1">
+            <a:schemeClr val="accent2"/>
+          </a:lnRef>
+          <a:fillRef idx="2">
+            <a:schemeClr val="accent2"/>
+          </a:fillRef>
+          <a:effectRef idx="1">
+            <a:schemeClr val="accent2"/>
+          </a:effectRef>
+          <a:fontRef idx="minor">
+            <a:schemeClr val="dk1"/>
+          </a:fontRef>
+        </p:style>
+        <p:txBody>
+          <a:bodyPr rtlCol="0" anchor="ctr"/>
+          <a:lstStyle/>
+          <a:p>
+            <a:pPr algn="ctr"/>
+            <a:r>
+              <a:rPr lang="it-IT" dirty="0"/>
+              <a:t>ONNX Runtime Engine</a:t>
+            </a:r>
+          </a:p>
+        </p:txBody>
+      </p:sp>
+      <p:cxnSp>
+        <p:nvCxnSpPr>
+          <p:cNvPr id="9" name="Connettore 2 8">
+            <a:extLst>
+              <a:ext uri="{FF2B5EF4-FFF2-40B4-BE49-F238E27FC236}">
+                <a16:creationId xmlns:a16="http://schemas.microsoft.com/office/drawing/2014/main" id="{674ACD6A-4069-9ED0-F934-AEE7540A6132}"/>
+              </a:ext>
+            </a:extLst>
+          </p:cNvPr>
+          <p:cNvCxnSpPr>
+            <a:cxnSpLocks/>
+            <a:stCxn id="5" idx="3"/>
+            <a:endCxn id="6" idx="1"/>
+          </p:cNvCxnSpPr>
+          <p:nvPr/>
+        </p:nvCxnSpPr>
+        <p:spPr>
+          <a:xfrm>
+            <a:off x="7138016" y="3073182"/>
+            <a:ext cx="919055" cy="0"/>
+          </a:xfrm>
+          <a:prstGeom prst="straightConnector1">
+            <a:avLst/>
+          </a:prstGeom>
+          <a:ln>
+            <a:tailEnd type="triangle"/>
+          </a:ln>
+        </p:spPr>
+        <p:style>
+          <a:lnRef idx="2">
+            <a:schemeClr val="dk1"/>
+          </a:lnRef>
+          <a:fillRef idx="0">
+            <a:schemeClr val="dk1"/>
+          </a:fillRef>
+          <a:effectRef idx="1">
+            <a:schemeClr val="dk1"/>
+          </a:effectRef>
+          <a:fontRef idx="minor">
+            <a:schemeClr val="tx1"/>
+          </a:fontRef>
+        </p:style>
+      </p:cxnSp>
+      <p:cxnSp>
+        <p:nvCxnSpPr>
+          <p:cNvPr id="11" name="Connettore 2 10">
+            <a:extLst>
+              <a:ext uri="{FF2B5EF4-FFF2-40B4-BE49-F238E27FC236}">
+                <a16:creationId xmlns:a16="http://schemas.microsoft.com/office/drawing/2014/main" id="{F2D2ED58-DC93-4A0B-1E9D-F03377ED513A}"/>
+              </a:ext>
+            </a:extLst>
+          </p:cNvPr>
+          <p:cNvCxnSpPr>
+            <a:cxnSpLocks/>
+            <a:stCxn id="6" idx="3"/>
+            <a:endCxn id="16" idx="2"/>
+          </p:cNvCxnSpPr>
+          <p:nvPr/>
+        </p:nvCxnSpPr>
+        <p:spPr>
+          <a:xfrm>
+            <a:off x="9275586" y="3073182"/>
+            <a:ext cx="818267" cy="0"/>
+          </a:xfrm>
+          <a:prstGeom prst="straightConnector1">
+            <a:avLst/>
+          </a:prstGeom>
+          <a:ln>
+            <a:tailEnd type="triangle"/>
+          </a:ln>
+        </p:spPr>
+        <p:style>
+          <a:lnRef idx="2">
+            <a:schemeClr val="dk1"/>
+          </a:lnRef>
+          <a:fillRef idx="0">
+            <a:schemeClr val="dk1"/>
+          </a:fillRef>
+          <a:effectRef idx="1">
+            <a:schemeClr val="dk1"/>
+          </a:effectRef>
+          <a:fontRef idx="minor">
+            <a:schemeClr val="tx1"/>
+          </a:fontRef>
+        </p:style>
+      </p:cxnSp>
+      <p:sp>
+        <p:nvSpPr>
+          <p:cNvPr id="15" name="Ovale 14">
+            <a:extLst>
+              <a:ext uri="{FF2B5EF4-FFF2-40B4-BE49-F238E27FC236}">
+                <a16:creationId xmlns:a16="http://schemas.microsoft.com/office/drawing/2014/main" id="{2807C056-602D-DB71-555C-7E2ECF990DCD}"/>
+              </a:ext>
+            </a:extLst>
+          </p:cNvPr>
+          <p:cNvSpPr/>
+          <p:nvPr/>
+        </p:nvSpPr>
+        <p:spPr>
+          <a:xfrm>
+            <a:off x="166644" y="2619956"/>
+            <a:ext cx="1870545" cy="914400"/>
+          </a:xfrm>
+          <a:prstGeom prst="ellipse">
+            <a:avLst/>
+          </a:prstGeom>
+        </p:spPr>
+        <p:style>
+          <a:lnRef idx="1">
+            <a:schemeClr val="accent4"/>
+          </a:lnRef>
+          <a:fillRef idx="2">
+            <a:schemeClr val="accent4"/>
+          </a:fillRef>
+          <a:effectRef idx="1">
+            <a:schemeClr val="accent4"/>
+          </a:effectRef>
+          <a:fontRef idx="minor">
+            <a:schemeClr val="dk1"/>
+          </a:fontRef>
+        </p:style>
+        <p:txBody>
+          <a:bodyPr rtlCol="0" anchor="ctr"/>
+          <a:lstStyle/>
+          <a:p>
+            <a:pPr algn="ctr"/>
+            <a:r>
+              <a:rPr lang="it-IT" dirty="0"/>
+              <a:t>Modello ViT </a:t>
+            </a:r>
+            <a:r>
+              <a:rPr lang="it-IT" dirty="0" err="1"/>
+              <a:t>PyTorch</a:t>
+            </a:r>
+            <a:endParaRPr lang="it-IT" dirty="0"/>
+          </a:p>
+        </p:txBody>
+      </p:sp>
+      <p:sp>
+        <p:nvSpPr>
+          <p:cNvPr id="16" name="Ovale 15">
+            <a:extLst>
+              <a:ext uri="{FF2B5EF4-FFF2-40B4-BE49-F238E27FC236}">
+                <a16:creationId xmlns:a16="http://schemas.microsoft.com/office/drawing/2014/main" id="{DA5887DD-B8F9-EC37-8A1C-23B8E0F3E44E}"/>
+              </a:ext>
+            </a:extLst>
+          </p:cNvPr>
+          <p:cNvSpPr/>
+          <p:nvPr/>
+        </p:nvSpPr>
+        <p:spPr>
+          <a:xfrm>
+            <a:off x="10093853" y="2615982"/>
+            <a:ext cx="1931503" cy="914400"/>
+          </a:xfrm>
+          <a:prstGeom prst="ellipse">
+            <a:avLst/>
+          </a:prstGeom>
+        </p:spPr>
+        <p:style>
+          <a:lnRef idx="1">
+            <a:schemeClr val="accent4"/>
+          </a:lnRef>
+          <a:fillRef idx="2">
+            <a:schemeClr val="accent4"/>
+          </a:fillRef>
+          <a:effectRef idx="1">
+            <a:schemeClr val="accent4"/>
+          </a:effectRef>
+          <a:fontRef idx="minor">
+            <a:schemeClr val="dk1"/>
+          </a:fontRef>
+        </p:style>
+        <p:txBody>
+          <a:bodyPr rtlCol="0" anchor="ctr"/>
+          <a:lstStyle/>
+          <a:p>
+            <a:pPr algn="ctr"/>
+            <a:r>
+              <a:rPr lang="it-IT" dirty="0" err="1"/>
+              <a:t>Deploy</a:t>
+            </a:r>
+            <a:endParaRPr lang="it-IT" dirty="0"/>
+          </a:p>
+          <a:p>
+            <a:pPr algn="ctr"/>
+            <a:r>
+              <a:rPr lang="it-IT" dirty="0"/>
+              <a:t> on-device </a:t>
+            </a:r>
+          </a:p>
+        </p:txBody>
+      </p:sp>
+      <p:sp>
+        <p:nvSpPr>
+          <p:cNvPr id="66" name="Rettangolo 65">
+            <a:extLst>
+              <a:ext uri="{FF2B5EF4-FFF2-40B4-BE49-F238E27FC236}">
+                <a16:creationId xmlns:a16="http://schemas.microsoft.com/office/drawing/2014/main" id="{255AAE5C-45C1-91CA-C09F-7C0AE9CE8D83}"/>
+              </a:ext>
+            </a:extLst>
+          </p:cNvPr>
+          <p:cNvSpPr/>
+          <p:nvPr/>
+        </p:nvSpPr>
+        <p:spPr>
+          <a:xfrm>
+            <a:off x="2803590" y="2564297"/>
+            <a:ext cx="1636644" cy="1025718"/>
+          </a:xfrm>
+          <a:prstGeom prst="rect">
+            <a:avLst/>
+          </a:prstGeom>
+        </p:spPr>
+        <p:style>
+          <a:lnRef idx="1">
+            <a:schemeClr val="accent2"/>
+          </a:lnRef>
+          <a:fillRef idx="2">
+            <a:schemeClr val="accent2"/>
+          </a:fillRef>
+          <a:effectRef idx="1">
+            <a:schemeClr val="accent2"/>
+          </a:effectRef>
+          <a:fontRef idx="minor">
+            <a:schemeClr val="dk1"/>
+          </a:fontRef>
+        </p:style>
+        <p:txBody>
+          <a:bodyPr rtlCol="0" anchor="ctr"/>
+          <a:lstStyle/>
+          <a:p>
+            <a:pPr algn="ctr"/>
+            <a:r>
+              <a:rPr lang="it-IT" dirty="0"/>
+              <a:t>Esportazione in formato ONNX </a:t>
+            </a:r>
+          </a:p>
+        </p:txBody>
+      </p:sp>
+      <p:cxnSp>
+        <p:nvCxnSpPr>
+          <p:cNvPr id="68" name="Connettore 2 67">
+            <a:extLst>
+              <a:ext uri="{FF2B5EF4-FFF2-40B4-BE49-F238E27FC236}">
+                <a16:creationId xmlns:a16="http://schemas.microsoft.com/office/drawing/2014/main" id="{8376F07C-FAC3-A4CE-4186-0CF6E4A5CA06}"/>
+              </a:ext>
+            </a:extLst>
+          </p:cNvPr>
+          <p:cNvCxnSpPr>
+            <a:cxnSpLocks/>
+            <a:stCxn id="15" idx="6"/>
+            <a:endCxn id="66" idx="1"/>
+          </p:cNvCxnSpPr>
+          <p:nvPr/>
+        </p:nvCxnSpPr>
+        <p:spPr>
+          <a:xfrm>
+            <a:off x="2037189" y="3077156"/>
+            <a:ext cx="766401" cy="0"/>
+          </a:xfrm>
+          <a:prstGeom prst="straightConnector1">
+            <a:avLst/>
+          </a:prstGeom>
+          <a:ln>
+            <a:tailEnd type="triangle"/>
+          </a:ln>
+        </p:spPr>
+        <p:style>
+          <a:lnRef idx="2">
+            <a:schemeClr val="dk1"/>
+          </a:lnRef>
+          <a:fillRef idx="0">
+            <a:schemeClr val="dk1"/>
+          </a:fillRef>
+          <a:effectRef idx="1">
+            <a:schemeClr val="dk1"/>
+          </a:effectRef>
+          <a:fontRef idx="minor">
+            <a:schemeClr val="tx1"/>
+          </a:fontRef>
+        </p:style>
+      </p:cxnSp>
+      <p:cxnSp>
+        <p:nvCxnSpPr>
+          <p:cNvPr id="70" name="Connettore 2 69">
+            <a:extLst>
+              <a:ext uri="{FF2B5EF4-FFF2-40B4-BE49-F238E27FC236}">
+                <a16:creationId xmlns:a16="http://schemas.microsoft.com/office/drawing/2014/main" id="{2FC8E348-A52E-BA9D-62A8-82AAF4037E52}"/>
+              </a:ext>
+            </a:extLst>
+          </p:cNvPr>
+          <p:cNvCxnSpPr>
+            <a:cxnSpLocks/>
+            <a:stCxn id="66" idx="3"/>
+            <a:endCxn id="5" idx="1"/>
+          </p:cNvCxnSpPr>
+          <p:nvPr/>
+        </p:nvCxnSpPr>
+        <p:spPr>
+          <a:xfrm flipV="1">
+            <a:off x="4440234" y="3073182"/>
+            <a:ext cx="919055" cy="3974"/>
+          </a:xfrm>
+          <a:prstGeom prst="straightConnector1">
+            <a:avLst/>
+          </a:prstGeom>
+          <a:ln>
+            <a:tailEnd type="triangle"/>
+          </a:ln>
+        </p:spPr>
+        <p:style>
+          <a:lnRef idx="2">
+            <a:schemeClr val="dk1"/>
+          </a:lnRef>
+          <a:fillRef idx="0">
+            <a:schemeClr val="dk1"/>
+          </a:fillRef>
+          <a:effectRef idx="1">
+            <a:schemeClr val="dk1"/>
+          </a:effectRef>
+          <a:fontRef idx="minor">
+            <a:schemeClr val="tx1"/>
+          </a:fontRef>
+        </p:style>
+      </p:cxnSp>
+    </p:spTree>
+    <p:extLst>
+      <p:ext uri="{BB962C8B-B14F-4D97-AF65-F5344CB8AC3E}">
+        <p14:creationId xmlns:p14="http://schemas.microsoft.com/office/powerpoint/2010/main" val="3430767836"/>
+      </p:ext>
+    </p:extLst>
+  </p:cSld>
+  <p:clrMapOvr>
+    <a:masterClrMapping/>
+  </p:clrMapOvr>
+</p:sld>
+</file>
+
+<file path=ppt/slides/slide3.xml><?xml version="1.0" encoding="utf-8"?>
 <p:sld xmlns:a="http://schemas.openxmlformats.org/drawingml/2006/main" xmlns:r="http://schemas.openxmlformats.org/officeDocument/2006/relationships" xmlns:p="http://schemas.openxmlformats.org/presentationml/2006/main">
   <p:cSld>
     <p:spTree>

--- a/processo.pptx
+++ b/processo.pptx
@@ -4,13 +4,17 @@
   <p:sldMasterIdLst>
     <p:sldMasterId id="2147483648" r:id="rId1"/>
   </p:sldMasterIdLst>
+  <p:notesMasterIdLst>
+    <p:notesMasterId r:id="rId6"/>
+  </p:notesMasterIdLst>
   <p:sldIdLst>
     <p:sldId id="256" r:id="rId2"/>
-    <p:sldId id="258" r:id="rId3"/>
-    <p:sldId id="257" r:id="rId4"/>
+    <p:sldId id="259" r:id="rId3"/>
+    <p:sldId id="258" r:id="rId4"/>
+    <p:sldId id="257" r:id="rId5"/>
   </p:sldIdLst>
   <p:sldSz cx="12192000" cy="6858000"/>
-  <p:notesSz cx="6858000" cy="9144000"/>
+  <p:notesSz cx="7104063" cy="10234613"/>
   <p:defaultTextStyle>
     <a:defPPr>
       <a:defRPr lang="it-IT"/>
@@ -114,6 +118,439 @@
 </p:presentation>
 </file>
 
+<file path=ppt/notesMasters/notesMaster1.xml><?xml version="1.0" encoding="utf-8"?>
+<p:notesMaster xmlns:a="http://schemas.openxmlformats.org/drawingml/2006/main" xmlns:r="http://schemas.openxmlformats.org/officeDocument/2006/relationships" xmlns:p="http://schemas.openxmlformats.org/presentationml/2006/main">
+  <p:cSld>
+    <p:bg>
+      <p:bgRef idx="1001">
+        <a:schemeClr val="bg1"/>
+      </p:bgRef>
+    </p:bg>
+    <p:spTree>
+      <p:nvGrpSpPr>
+        <p:cNvPr id="1" name=""/>
+        <p:cNvGrpSpPr/>
+        <p:nvPr/>
+      </p:nvGrpSpPr>
+      <p:grpSpPr>
+        <a:xfrm>
+          <a:off x="0" y="0"/>
+          <a:ext cx="0" cy="0"/>
+          <a:chOff x="0" y="0"/>
+          <a:chExt cx="0" cy="0"/>
+        </a:xfrm>
+      </p:grpSpPr>
+      <p:sp>
+        <p:nvSpPr>
+          <p:cNvPr id="2" name="Segnaposto intestazione 1"/>
+          <p:cNvSpPr>
+            <a:spLocks noGrp="1"/>
+          </p:cNvSpPr>
+          <p:nvPr>
+            <p:ph type="hdr" sz="quarter"/>
+          </p:nvPr>
+        </p:nvSpPr>
+        <p:spPr>
+          <a:xfrm>
+            <a:off x="0" y="0"/>
+            <a:ext cx="3078163" cy="512763"/>
+          </a:xfrm>
+          <a:prstGeom prst="rect">
+            <a:avLst/>
+          </a:prstGeom>
+        </p:spPr>
+        <p:txBody>
+          <a:bodyPr vert="horz" lIns="91440" tIns="45720" rIns="91440" bIns="45720" rtlCol="0"/>
+          <a:lstStyle>
+            <a:lvl1pPr algn="l">
+              <a:defRPr sz="1200"/>
+            </a:lvl1pPr>
+          </a:lstStyle>
+          <a:p>
+            <a:endParaRPr lang="it-IT"/>
+          </a:p>
+        </p:txBody>
+      </p:sp>
+      <p:sp>
+        <p:nvSpPr>
+          <p:cNvPr id="3" name="Segnaposto data 2"/>
+          <p:cNvSpPr>
+            <a:spLocks noGrp="1"/>
+          </p:cNvSpPr>
+          <p:nvPr>
+            <p:ph type="dt" idx="1"/>
+          </p:nvPr>
+        </p:nvSpPr>
+        <p:spPr>
+          <a:xfrm>
+            <a:off x="4024313" y="0"/>
+            <a:ext cx="3078162" cy="512763"/>
+          </a:xfrm>
+          <a:prstGeom prst="rect">
+            <a:avLst/>
+          </a:prstGeom>
+        </p:spPr>
+        <p:txBody>
+          <a:bodyPr vert="horz" lIns="91440" tIns="45720" rIns="91440" bIns="45720" rtlCol="0"/>
+          <a:lstStyle>
+            <a:lvl1pPr algn="r">
+              <a:defRPr sz="1200"/>
+            </a:lvl1pPr>
+          </a:lstStyle>
+          <a:p>
+            <a:fld id="{96D3E21C-7203-4030-93A9-821B589C9211}" type="datetimeFigureOut">
+              <a:rPr lang="it-IT" smtClean="0"/>
+              <a:t>16/06/2026</a:t>
+            </a:fld>
+            <a:endParaRPr lang="it-IT"/>
+          </a:p>
+        </p:txBody>
+      </p:sp>
+      <p:sp>
+        <p:nvSpPr>
+          <p:cNvPr id="4" name="Segnaposto immagine diapositiva 3"/>
+          <p:cNvSpPr>
+            <a:spLocks noGrp="1" noRot="1" noChangeAspect="1"/>
+          </p:cNvSpPr>
+          <p:nvPr>
+            <p:ph type="sldImg" idx="2"/>
+          </p:nvPr>
+        </p:nvSpPr>
+        <p:spPr>
+          <a:xfrm>
+            <a:off x="482600" y="1279525"/>
+            <a:ext cx="6140450" cy="3454400"/>
+          </a:xfrm>
+          <a:prstGeom prst="rect">
+            <a:avLst/>
+          </a:prstGeom>
+          <a:noFill/>
+          <a:ln w="12700">
+            <a:solidFill>
+              <a:prstClr val="black"/>
+            </a:solidFill>
+          </a:ln>
+        </p:spPr>
+        <p:txBody>
+          <a:bodyPr vert="horz" lIns="91440" tIns="45720" rIns="91440" bIns="45720" rtlCol="0" anchor="ctr"/>
+          <a:lstStyle/>
+          <a:p>
+            <a:endParaRPr lang="it-IT"/>
+          </a:p>
+        </p:txBody>
+      </p:sp>
+      <p:sp>
+        <p:nvSpPr>
+          <p:cNvPr id="5" name="Segnaposto note 4"/>
+          <p:cNvSpPr>
+            <a:spLocks noGrp="1"/>
+          </p:cNvSpPr>
+          <p:nvPr>
+            <p:ph type="body" sz="quarter" idx="3"/>
+          </p:nvPr>
+        </p:nvSpPr>
+        <p:spPr>
+          <a:xfrm>
+            <a:off x="711200" y="4926013"/>
+            <a:ext cx="5683250" cy="4029075"/>
+          </a:xfrm>
+          <a:prstGeom prst="rect">
+            <a:avLst/>
+          </a:prstGeom>
+        </p:spPr>
+        <p:txBody>
+          <a:bodyPr vert="horz" lIns="91440" tIns="45720" rIns="91440" bIns="45720" rtlCol="0"/>
+          <a:lstStyle/>
+          <a:p>
+            <a:pPr lvl="0"/>
+            <a:r>
+              <a:rPr lang="it-IT"/>
+              <a:t>Fare clic per modificare gli stili del testo dello schema</a:t>
+            </a:r>
+          </a:p>
+          <a:p>
+            <a:pPr lvl="1"/>
+            <a:r>
+              <a:rPr lang="it-IT"/>
+              <a:t>Secondo livello</a:t>
+            </a:r>
+          </a:p>
+          <a:p>
+            <a:pPr lvl="2"/>
+            <a:r>
+              <a:rPr lang="it-IT"/>
+              <a:t>Terzo livello</a:t>
+            </a:r>
+          </a:p>
+          <a:p>
+            <a:pPr lvl="3"/>
+            <a:r>
+              <a:rPr lang="it-IT"/>
+              <a:t>Quarto livello</a:t>
+            </a:r>
+          </a:p>
+          <a:p>
+            <a:pPr lvl="4"/>
+            <a:r>
+              <a:rPr lang="it-IT"/>
+              <a:t>Quinto livello</a:t>
+            </a:r>
+          </a:p>
+        </p:txBody>
+      </p:sp>
+      <p:sp>
+        <p:nvSpPr>
+          <p:cNvPr id="6" name="Segnaposto piè di pagina 5"/>
+          <p:cNvSpPr>
+            <a:spLocks noGrp="1"/>
+          </p:cNvSpPr>
+          <p:nvPr>
+            <p:ph type="ftr" sz="quarter" idx="4"/>
+          </p:nvPr>
+        </p:nvSpPr>
+        <p:spPr>
+          <a:xfrm>
+            <a:off x="0" y="9721850"/>
+            <a:ext cx="3078163" cy="512763"/>
+          </a:xfrm>
+          <a:prstGeom prst="rect">
+            <a:avLst/>
+          </a:prstGeom>
+        </p:spPr>
+        <p:txBody>
+          <a:bodyPr vert="horz" lIns="91440" tIns="45720" rIns="91440" bIns="45720" rtlCol="0" anchor="b"/>
+          <a:lstStyle>
+            <a:lvl1pPr algn="l">
+              <a:defRPr sz="1200"/>
+            </a:lvl1pPr>
+          </a:lstStyle>
+          <a:p>
+            <a:endParaRPr lang="it-IT"/>
+          </a:p>
+        </p:txBody>
+      </p:sp>
+      <p:sp>
+        <p:nvSpPr>
+          <p:cNvPr id="7" name="Segnaposto numero diapositiva 6"/>
+          <p:cNvSpPr>
+            <a:spLocks noGrp="1"/>
+          </p:cNvSpPr>
+          <p:nvPr>
+            <p:ph type="sldNum" sz="quarter" idx="5"/>
+          </p:nvPr>
+        </p:nvSpPr>
+        <p:spPr>
+          <a:xfrm>
+            <a:off x="4024313" y="9721850"/>
+            <a:ext cx="3078162" cy="512763"/>
+          </a:xfrm>
+          <a:prstGeom prst="rect">
+            <a:avLst/>
+          </a:prstGeom>
+        </p:spPr>
+        <p:txBody>
+          <a:bodyPr vert="horz" lIns="91440" tIns="45720" rIns="91440" bIns="45720" rtlCol="0" anchor="b"/>
+          <a:lstStyle>
+            <a:lvl1pPr algn="r">
+              <a:defRPr sz="1200"/>
+            </a:lvl1pPr>
+          </a:lstStyle>
+          <a:p>
+            <a:fld id="{0282E20B-902C-4711-88DF-099A1F209174}" type="slidenum">
+              <a:rPr lang="it-IT" smtClean="0"/>
+              <a:t>‹N›</a:t>
+            </a:fld>
+            <a:endParaRPr lang="it-IT"/>
+          </a:p>
+        </p:txBody>
+      </p:sp>
+    </p:spTree>
+    <p:extLst>
+      <p:ext uri="{BB962C8B-B14F-4D97-AF65-F5344CB8AC3E}">
+        <p14:creationId xmlns:p14="http://schemas.microsoft.com/office/powerpoint/2010/main" val="1456210653"/>
+      </p:ext>
+    </p:extLst>
+  </p:cSld>
+  <p:clrMap bg1="lt1" tx1="dk1" bg2="lt2" tx2="dk2" accent1="accent1" accent2="accent2" accent3="accent3" accent4="accent4" accent5="accent5" accent6="accent6" hlink="hlink" folHlink="folHlink"/>
+  <p:notesStyle>
+    <a:lvl1pPr marL="0" algn="l" defTabSz="914400" rtl="0" eaLnBrk="1" latinLnBrk="0" hangingPunct="1">
+      <a:defRPr sz="1200" kern="1200">
+        <a:solidFill>
+          <a:schemeClr val="tx1"/>
+        </a:solidFill>
+        <a:latin typeface="+mn-lt"/>
+        <a:ea typeface="+mn-ea"/>
+        <a:cs typeface="+mn-cs"/>
+      </a:defRPr>
+    </a:lvl1pPr>
+    <a:lvl2pPr marL="457200" algn="l" defTabSz="914400" rtl="0" eaLnBrk="1" latinLnBrk="0" hangingPunct="1">
+      <a:defRPr sz="1200" kern="1200">
+        <a:solidFill>
+          <a:schemeClr val="tx1"/>
+        </a:solidFill>
+        <a:latin typeface="+mn-lt"/>
+        <a:ea typeface="+mn-ea"/>
+        <a:cs typeface="+mn-cs"/>
+      </a:defRPr>
+    </a:lvl2pPr>
+    <a:lvl3pPr marL="914400" algn="l" defTabSz="914400" rtl="0" eaLnBrk="1" latinLnBrk="0" hangingPunct="1">
+      <a:defRPr sz="1200" kern="1200">
+        <a:solidFill>
+          <a:schemeClr val="tx1"/>
+        </a:solidFill>
+        <a:latin typeface="+mn-lt"/>
+        <a:ea typeface="+mn-ea"/>
+        <a:cs typeface="+mn-cs"/>
+      </a:defRPr>
+    </a:lvl3pPr>
+    <a:lvl4pPr marL="1371600" algn="l" defTabSz="914400" rtl="0" eaLnBrk="1" latinLnBrk="0" hangingPunct="1">
+      <a:defRPr sz="1200" kern="1200">
+        <a:solidFill>
+          <a:schemeClr val="tx1"/>
+        </a:solidFill>
+        <a:latin typeface="+mn-lt"/>
+        <a:ea typeface="+mn-ea"/>
+        <a:cs typeface="+mn-cs"/>
+      </a:defRPr>
+    </a:lvl4pPr>
+    <a:lvl5pPr marL="1828800" algn="l" defTabSz="914400" rtl="0" eaLnBrk="1" latinLnBrk="0" hangingPunct="1">
+      <a:defRPr sz="1200" kern="1200">
+        <a:solidFill>
+          <a:schemeClr val="tx1"/>
+        </a:solidFill>
+        <a:latin typeface="+mn-lt"/>
+        <a:ea typeface="+mn-ea"/>
+        <a:cs typeface="+mn-cs"/>
+      </a:defRPr>
+    </a:lvl5pPr>
+    <a:lvl6pPr marL="2286000" algn="l" defTabSz="914400" rtl="0" eaLnBrk="1" latinLnBrk="0" hangingPunct="1">
+      <a:defRPr sz="1200" kern="1200">
+        <a:solidFill>
+          <a:schemeClr val="tx1"/>
+        </a:solidFill>
+        <a:latin typeface="+mn-lt"/>
+        <a:ea typeface="+mn-ea"/>
+        <a:cs typeface="+mn-cs"/>
+      </a:defRPr>
+    </a:lvl6pPr>
+    <a:lvl7pPr marL="2743200" algn="l" defTabSz="914400" rtl="0" eaLnBrk="1" latinLnBrk="0" hangingPunct="1">
+      <a:defRPr sz="1200" kern="1200">
+        <a:solidFill>
+          <a:schemeClr val="tx1"/>
+        </a:solidFill>
+        <a:latin typeface="+mn-lt"/>
+        <a:ea typeface="+mn-ea"/>
+        <a:cs typeface="+mn-cs"/>
+      </a:defRPr>
+    </a:lvl7pPr>
+    <a:lvl8pPr marL="3200400" algn="l" defTabSz="914400" rtl="0" eaLnBrk="1" latinLnBrk="0" hangingPunct="1">
+      <a:defRPr sz="1200" kern="1200">
+        <a:solidFill>
+          <a:schemeClr val="tx1"/>
+        </a:solidFill>
+        <a:latin typeface="+mn-lt"/>
+        <a:ea typeface="+mn-ea"/>
+        <a:cs typeface="+mn-cs"/>
+      </a:defRPr>
+    </a:lvl8pPr>
+    <a:lvl9pPr marL="3657600" algn="l" defTabSz="914400" rtl="0" eaLnBrk="1" latinLnBrk="0" hangingPunct="1">
+      <a:defRPr sz="1200" kern="1200">
+        <a:solidFill>
+          <a:schemeClr val="tx1"/>
+        </a:solidFill>
+        <a:latin typeface="+mn-lt"/>
+        <a:ea typeface="+mn-ea"/>
+        <a:cs typeface="+mn-cs"/>
+      </a:defRPr>
+    </a:lvl9pPr>
+  </p:notesStyle>
+</p:notesMaster>
+</file>
+
+<file path=ppt/notesSlides/notesSlide1.xml><?xml version="1.0" encoding="utf-8"?>
+<p:notes xmlns:a="http://schemas.openxmlformats.org/drawingml/2006/main" xmlns:r="http://schemas.openxmlformats.org/officeDocument/2006/relationships" xmlns:p="http://schemas.openxmlformats.org/presentationml/2006/main">
+  <p:cSld>
+    <p:spTree>
+      <p:nvGrpSpPr>
+        <p:cNvPr id="1" name=""/>
+        <p:cNvGrpSpPr/>
+        <p:nvPr/>
+      </p:nvGrpSpPr>
+      <p:grpSpPr>
+        <a:xfrm>
+          <a:off x="0" y="0"/>
+          <a:ext cx="0" cy="0"/>
+          <a:chOff x="0" y="0"/>
+          <a:chExt cx="0" cy="0"/>
+        </a:xfrm>
+      </p:grpSpPr>
+      <p:sp>
+        <p:nvSpPr>
+          <p:cNvPr id="2" name="Segnaposto immagine diapositiva 1"/>
+          <p:cNvSpPr>
+            <a:spLocks noGrp="1" noRot="1" noChangeAspect="1"/>
+          </p:cNvSpPr>
+          <p:nvPr>
+            <p:ph type="sldImg"/>
+          </p:nvPr>
+        </p:nvSpPr>
+        <p:spPr/>
+      </p:sp>
+      <p:sp>
+        <p:nvSpPr>
+          <p:cNvPr id="3" name="Segnaposto note 2"/>
+          <p:cNvSpPr>
+            <a:spLocks noGrp="1"/>
+          </p:cNvSpPr>
+          <p:nvPr>
+            <p:ph type="body" idx="1"/>
+          </p:nvPr>
+        </p:nvSpPr>
+        <p:spPr/>
+        <p:txBody>
+          <a:bodyPr/>
+          <a:lstStyle/>
+          <a:p>
+            <a:endParaRPr lang="it-IT"/>
+          </a:p>
+        </p:txBody>
+      </p:sp>
+      <p:sp>
+        <p:nvSpPr>
+          <p:cNvPr id="4" name="Segnaposto numero diapositiva 3"/>
+          <p:cNvSpPr>
+            <a:spLocks noGrp="1"/>
+          </p:cNvSpPr>
+          <p:nvPr>
+            <p:ph type="sldNum" sz="quarter" idx="5"/>
+          </p:nvPr>
+        </p:nvSpPr>
+        <p:spPr/>
+        <p:txBody>
+          <a:bodyPr/>
+          <a:lstStyle/>
+          <a:p>
+            <a:fld id="{0282E20B-902C-4711-88DF-099A1F209174}" type="slidenum">
+              <a:rPr lang="it-IT" smtClean="0"/>
+              <a:t>2</a:t>
+            </a:fld>
+            <a:endParaRPr lang="it-IT"/>
+          </a:p>
+        </p:txBody>
+      </p:sp>
+    </p:spTree>
+    <p:extLst>
+      <p:ext uri="{BB962C8B-B14F-4D97-AF65-F5344CB8AC3E}">
+        <p14:creationId xmlns:p14="http://schemas.microsoft.com/office/powerpoint/2010/main" val="1252729653"/>
+      </p:ext>
+    </p:extLst>
+  </p:cSld>
+  <p:clrMapOvr>
+    <a:masterClrMapping/>
+  </p:clrMapOvr>
+</p:notes>
+</file>
+
 <file path=ppt/slideLayouts/slideLayout1.xml><?xml version="1.0" encoding="utf-8"?>
 <p:sldLayout xmlns:a="http://schemas.openxmlformats.org/drawingml/2006/main" xmlns:r="http://schemas.openxmlformats.org/officeDocument/2006/relationships" xmlns:p="http://schemas.openxmlformats.org/presentationml/2006/main" type="title" preserve="1">
   <p:cSld name="Diapositiva titolo">
@@ -261,7 +698,7 @@
           <a:p>
             <a:fld id="{7B423683-9919-4DCC-881B-197980B1E2E2}" type="datetimeFigureOut">
               <a:rPr lang="it-IT" smtClean="0"/>
-              <a:t>24/05/2026</a:t>
+              <a:t>16/06/2026</a:t>
             </a:fld>
             <a:endParaRPr lang="it-IT"/>
           </a:p>
@@ -459,7 +896,7 @@
           <a:p>
             <a:fld id="{7B423683-9919-4DCC-881B-197980B1E2E2}" type="datetimeFigureOut">
               <a:rPr lang="it-IT" smtClean="0"/>
-              <a:t>24/05/2026</a:t>
+              <a:t>16/06/2026</a:t>
             </a:fld>
             <a:endParaRPr lang="it-IT"/>
           </a:p>
@@ -667,7 +1104,7 @@
           <a:p>
             <a:fld id="{7B423683-9919-4DCC-881B-197980B1E2E2}" type="datetimeFigureOut">
               <a:rPr lang="it-IT" smtClean="0"/>
-              <a:t>24/05/2026</a:t>
+              <a:t>16/06/2026</a:t>
             </a:fld>
             <a:endParaRPr lang="it-IT"/>
           </a:p>
@@ -865,7 +1302,7 @@
           <a:p>
             <a:fld id="{7B423683-9919-4DCC-881B-197980B1E2E2}" type="datetimeFigureOut">
               <a:rPr lang="it-IT" smtClean="0"/>
-              <a:t>24/05/2026</a:t>
+              <a:t>16/06/2026</a:t>
             </a:fld>
             <a:endParaRPr lang="it-IT"/>
           </a:p>
@@ -1140,7 +1577,7 @@
           <a:p>
             <a:fld id="{7B423683-9919-4DCC-881B-197980B1E2E2}" type="datetimeFigureOut">
               <a:rPr lang="it-IT" smtClean="0"/>
-              <a:t>24/05/2026</a:t>
+              <a:t>16/06/2026</a:t>
             </a:fld>
             <a:endParaRPr lang="it-IT"/>
           </a:p>
@@ -1405,7 +1842,7 @@
           <a:p>
             <a:fld id="{7B423683-9919-4DCC-881B-197980B1E2E2}" type="datetimeFigureOut">
               <a:rPr lang="it-IT" smtClean="0"/>
-              <a:t>24/05/2026</a:t>
+              <a:t>16/06/2026</a:t>
             </a:fld>
             <a:endParaRPr lang="it-IT"/>
           </a:p>
@@ -1817,7 +2254,7 @@
           <a:p>
             <a:fld id="{7B423683-9919-4DCC-881B-197980B1E2E2}" type="datetimeFigureOut">
               <a:rPr lang="it-IT" smtClean="0"/>
-              <a:t>24/05/2026</a:t>
+              <a:t>16/06/2026</a:t>
             </a:fld>
             <a:endParaRPr lang="it-IT"/>
           </a:p>
@@ -1958,7 +2395,7 @@
           <a:p>
             <a:fld id="{7B423683-9919-4DCC-881B-197980B1E2E2}" type="datetimeFigureOut">
               <a:rPr lang="it-IT" smtClean="0"/>
-              <a:t>24/05/2026</a:t>
+              <a:t>16/06/2026</a:t>
             </a:fld>
             <a:endParaRPr lang="it-IT"/>
           </a:p>
@@ -2071,7 +2508,7 @@
           <a:p>
             <a:fld id="{7B423683-9919-4DCC-881B-197980B1E2E2}" type="datetimeFigureOut">
               <a:rPr lang="it-IT" smtClean="0"/>
-              <a:t>24/05/2026</a:t>
+              <a:t>16/06/2026</a:t>
             </a:fld>
             <a:endParaRPr lang="it-IT"/>
           </a:p>
@@ -2382,7 +2819,7 @@
           <a:p>
             <a:fld id="{7B423683-9919-4DCC-881B-197980B1E2E2}" type="datetimeFigureOut">
               <a:rPr lang="it-IT" smtClean="0"/>
-              <a:t>24/05/2026</a:t>
+              <a:t>16/06/2026</a:t>
             </a:fld>
             <a:endParaRPr lang="it-IT"/>
           </a:p>
@@ -2670,7 +3107,7 @@
           <a:p>
             <a:fld id="{7B423683-9919-4DCC-881B-197980B1E2E2}" type="datetimeFigureOut">
               <a:rPr lang="it-IT" smtClean="0"/>
-              <a:t>24/05/2026</a:t>
+              <a:t>16/06/2026</a:t>
             </a:fld>
             <a:endParaRPr lang="it-IT"/>
           </a:p>
@@ -2911,7 +3348,7 @@
           <a:p>
             <a:fld id="{7B423683-9919-4DCC-881B-197980B1E2E2}" type="datetimeFigureOut">
               <a:rPr lang="it-IT" smtClean="0"/>
-              <a:t>24/05/2026</a:t>
+              <a:t>16/06/2026</a:t>
             </a:fld>
             <a:endParaRPr lang="it-IT"/>
           </a:p>
@@ -3976,6 +4413,1371 @@
         <p:cNvPr id="1" name="">
           <a:extLst>
             <a:ext uri="{FF2B5EF4-FFF2-40B4-BE49-F238E27FC236}">
+              <a16:creationId xmlns:a16="http://schemas.microsoft.com/office/drawing/2014/main" id="{655FAF30-5DDD-90D3-4410-95B006164BAC}"/>
+            </a:ext>
+          </a:extLst>
+        </p:cNvPr>
+        <p:cNvGrpSpPr/>
+        <p:nvPr/>
+      </p:nvGrpSpPr>
+      <p:grpSpPr>
+        <a:xfrm>
+          <a:off x="0" y="0"/>
+          <a:ext cx="0" cy="0"/>
+          <a:chOff x="0" y="0"/>
+          <a:chExt cx="0" cy="0"/>
+        </a:xfrm>
+      </p:grpSpPr>
+      <p:sp>
+        <p:nvSpPr>
+          <p:cNvPr id="5" name="Rettangolo con angoli arrotondati 4">
+            <a:extLst>
+              <a:ext uri="{FF2B5EF4-FFF2-40B4-BE49-F238E27FC236}">
+                <a16:creationId xmlns:a16="http://schemas.microsoft.com/office/drawing/2014/main" id="{FFF0AFF6-0A98-E10B-240F-2B7B1B4A0A83}"/>
+              </a:ext>
+            </a:extLst>
+          </p:cNvPr>
+          <p:cNvSpPr/>
+          <p:nvPr/>
+        </p:nvSpPr>
+        <p:spPr>
+          <a:xfrm>
+            <a:off x="4465229" y="1739196"/>
+            <a:ext cx="1258562" cy="1025718"/>
+          </a:xfrm>
+          <a:prstGeom prst="roundRect">
+            <a:avLst/>
+          </a:prstGeom>
+        </p:spPr>
+        <p:style>
+          <a:lnRef idx="1">
+            <a:schemeClr val="accent6"/>
+          </a:lnRef>
+          <a:fillRef idx="2">
+            <a:schemeClr val="accent6"/>
+          </a:fillRef>
+          <a:effectRef idx="1">
+            <a:schemeClr val="accent6"/>
+          </a:effectRef>
+          <a:fontRef idx="minor">
+            <a:schemeClr val="dk1"/>
+          </a:fontRef>
+        </p:style>
+        <p:txBody>
+          <a:bodyPr rtlCol="0" anchor="ctr"/>
+          <a:lstStyle/>
+          <a:p>
+            <a:pPr algn="ctr"/>
+            <a:r>
+              <a:rPr lang="it-IT" dirty="0"/>
+              <a:t>Search </a:t>
+            </a:r>
+            <a:r>
+              <a:rPr lang="it-IT" dirty="0" err="1"/>
+              <a:t>Algorithm</a:t>
+            </a:r>
+            <a:endParaRPr lang="it-IT" dirty="0"/>
+          </a:p>
+        </p:txBody>
+      </p:sp>
+      <p:sp>
+        <p:nvSpPr>
+          <p:cNvPr id="6" name="Rettangolo con angoli arrotondati 5">
+            <a:extLst>
+              <a:ext uri="{FF2B5EF4-FFF2-40B4-BE49-F238E27FC236}">
+                <a16:creationId xmlns:a16="http://schemas.microsoft.com/office/drawing/2014/main" id="{98E40FBA-C40D-A5C0-589A-7A6536A73007}"/>
+              </a:ext>
+            </a:extLst>
+          </p:cNvPr>
+          <p:cNvSpPr/>
+          <p:nvPr/>
+        </p:nvSpPr>
+        <p:spPr>
+          <a:xfrm>
+            <a:off x="6052228" y="1743170"/>
+            <a:ext cx="1813740" cy="1025718"/>
+          </a:xfrm>
+          <a:prstGeom prst="roundRect">
+            <a:avLst/>
+          </a:prstGeom>
+        </p:spPr>
+        <p:style>
+          <a:lnRef idx="1">
+            <a:schemeClr val="accent6"/>
+          </a:lnRef>
+          <a:fillRef idx="2">
+            <a:schemeClr val="accent6"/>
+          </a:fillRef>
+          <a:effectRef idx="1">
+            <a:schemeClr val="accent6"/>
+          </a:effectRef>
+          <a:fontRef idx="minor">
+            <a:schemeClr val="dk1"/>
+          </a:fontRef>
+        </p:style>
+        <p:txBody>
+          <a:bodyPr rtlCol="0" anchor="ctr"/>
+          <a:lstStyle/>
+          <a:p>
+            <a:pPr algn="ctr"/>
+            <a:r>
+              <a:rPr lang="it-IT" dirty="0"/>
+              <a:t>Model </a:t>
+            </a:r>
+            <a:r>
+              <a:rPr lang="it-IT" dirty="0" err="1"/>
+              <a:t>Reconstruction</a:t>
+            </a:r>
+            <a:r>
+              <a:rPr lang="it-IT" dirty="0"/>
+              <a:t> </a:t>
+            </a:r>
+          </a:p>
+        </p:txBody>
+      </p:sp>
+      <p:sp>
+        <p:nvSpPr>
+          <p:cNvPr id="7" name="Rettangolo con angoli arrotondati 6">
+            <a:extLst>
+              <a:ext uri="{FF2B5EF4-FFF2-40B4-BE49-F238E27FC236}">
+                <a16:creationId xmlns:a16="http://schemas.microsoft.com/office/drawing/2014/main" id="{5C753DB1-050B-305B-FBF9-03F156522CD0}"/>
+              </a:ext>
+            </a:extLst>
+          </p:cNvPr>
+          <p:cNvSpPr/>
+          <p:nvPr/>
+        </p:nvSpPr>
+        <p:spPr>
+          <a:xfrm>
+            <a:off x="8252315" y="1743170"/>
+            <a:ext cx="1193832" cy="1025718"/>
+          </a:xfrm>
+          <a:prstGeom prst="roundRect">
+            <a:avLst/>
+          </a:prstGeom>
+        </p:spPr>
+        <p:style>
+          <a:lnRef idx="1">
+            <a:schemeClr val="accent6"/>
+          </a:lnRef>
+          <a:fillRef idx="2">
+            <a:schemeClr val="accent6"/>
+          </a:fillRef>
+          <a:effectRef idx="1">
+            <a:schemeClr val="accent6"/>
+          </a:effectRef>
+          <a:fontRef idx="minor">
+            <a:schemeClr val="dk1"/>
+          </a:fontRef>
+        </p:style>
+        <p:txBody>
+          <a:bodyPr rtlCol="0" anchor="ctr"/>
+          <a:lstStyle/>
+          <a:p>
+            <a:pPr algn="ctr"/>
+            <a:r>
+              <a:rPr lang="it-IT" dirty="0" err="1"/>
+              <a:t>RecoveryFine</a:t>
+            </a:r>
+            <a:r>
+              <a:rPr lang="it-IT" dirty="0"/>
+              <a:t> Tuning</a:t>
+            </a:r>
+          </a:p>
+        </p:txBody>
+      </p:sp>
+      <p:cxnSp>
+        <p:nvCxnSpPr>
+          <p:cNvPr id="9" name="Connettore 2 8">
+            <a:extLst>
+              <a:ext uri="{FF2B5EF4-FFF2-40B4-BE49-F238E27FC236}">
+                <a16:creationId xmlns:a16="http://schemas.microsoft.com/office/drawing/2014/main" id="{6434A44B-1021-2517-2D73-9330197DC2AC}"/>
+              </a:ext>
+            </a:extLst>
+          </p:cNvPr>
+          <p:cNvCxnSpPr>
+            <a:cxnSpLocks/>
+            <a:stCxn id="5" idx="3"/>
+            <a:endCxn id="6" idx="1"/>
+          </p:cNvCxnSpPr>
+          <p:nvPr/>
+        </p:nvCxnSpPr>
+        <p:spPr>
+          <a:xfrm>
+            <a:off x="5723791" y="2252055"/>
+            <a:ext cx="328437" cy="3974"/>
+          </a:xfrm>
+          <a:prstGeom prst="straightConnector1">
+            <a:avLst/>
+          </a:prstGeom>
+          <a:ln>
+            <a:tailEnd type="triangle"/>
+          </a:ln>
+        </p:spPr>
+        <p:style>
+          <a:lnRef idx="2">
+            <a:schemeClr val="dk1"/>
+          </a:lnRef>
+          <a:fillRef idx="0">
+            <a:schemeClr val="dk1"/>
+          </a:fillRef>
+          <a:effectRef idx="1">
+            <a:schemeClr val="dk1"/>
+          </a:effectRef>
+          <a:fontRef idx="minor">
+            <a:schemeClr val="tx1"/>
+          </a:fontRef>
+        </p:style>
+      </p:cxnSp>
+      <p:cxnSp>
+        <p:nvCxnSpPr>
+          <p:cNvPr id="11" name="Connettore 2 10">
+            <a:extLst>
+              <a:ext uri="{FF2B5EF4-FFF2-40B4-BE49-F238E27FC236}">
+                <a16:creationId xmlns:a16="http://schemas.microsoft.com/office/drawing/2014/main" id="{FF0C3714-AAE7-40CE-B8C1-EC390ED28C48}"/>
+              </a:ext>
+            </a:extLst>
+          </p:cNvPr>
+          <p:cNvCxnSpPr>
+            <a:cxnSpLocks/>
+            <a:stCxn id="6" idx="3"/>
+            <a:endCxn id="7" idx="1"/>
+          </p:cNvCxnSpPr>
+          <p:nvPr/>
+        </p:nvCxnSpPr>
+        <p:spPr>
+          <a:xfrm>
+            <a:off x="7865968" y="2256029"/>
+            <a:ext cx="386347" cy="0"/>
+          </a:xfrm>
+          <a:prstGeom prst="straightConnector1">
+            <a:avLst/>
+          </a:prstGeom>
+          <a:ln>
+            <a:tailEnd type="triangle"/>
+          </a:ln>
+        </p:spPr>
+        <p:style>
+          <a:lnRef idx="2">
+            <a:schemeClr val="dk1"/>
+          </a:lnRef>
+          <a:fillRef idx="0">
+            <a:schemeClr val="dk1"/>
+          </a:fillRef>
+          <a:effectRef idx="1">
+            <a:schemeClr val="dk1"/>
+          </a:effectRef>
+          <a:fontRef idx="minor">
+            <a:schemeClr val="tx1"/>
+          </a:fontRef>
+        </p:style>
+      </p:cxnSp>
+      <p:sp>
+        <p:nvSpPr>
+          <p:cNvPr id="15" name="Ovale 14">
+            <a:extLst>
+              <a:ext uri="{FF2B5EF4-FFF2-40B4-BE49-F238E27FC236}">
+                <a16:creationId xmlns:a16="http://schemas.microsoft.com/office/drawing/2014/main" id="{A93DDA34-9AEE-F565-05EE-1320D9A92D79}"/>
+              </a:ext>
+            </a:extLst>
+          </p:cNvPr>
+          <p:cNvSpPr/>
+          <p:nvPr/>
+        </p:nvSpPr>
+        <p:spPr>
+          <a:xfrm>
+            <a:off x="97633" y="1798829"/>
+            <a:ext cx="1870545" cy="914400"/>
+          </a:xfrm>
+          <a:prstGeom prst="ellipse">
+            <a:avLst/>
+          </a:prstGeom>
+        </p:spPr>
+        <p:style>
+          <a:lnRef idx="1">
+            <a:schemeClr val="accent4"/>
+          </a:lnRef>
+          <a:fillRef idx="2">
+            <a:schemeClr val="accent4"/>
+          </a:fillRef>
+          <a:effectRef idx="1">
+            <a:schemeClr val="accent4"/>
+          </a:effectRef>
+          <a:fontRef idx="minor">
+            <a:schemeClr val="dk1"/>
+          </a:fontRef>
+        </p:style>
+        <p:txBody>
+          <a:bodyPr rtlCol="0" anchor="ctr"/>
+          <a:lstStyle/>
+          <a:p>
+            <a:pPr algn="ctr"/>
+            <a:r>
+              <a:rPr lang="it-IT" dirty="0" err="1"/>
+              <a:t>Original</a:t>
+            </a:r>
+            <a:r>
+              <a:rPr lang="it-IT" dirty="0"/>
+              <a:t> ViT Model</a:t>
+            </a:r>
+          </a:p>
+        </p:txBody>
+      </p:sp>
+      <p:sp>
+        <p:nvSpPr>
+          <p:cNvPr id="16" name="Ovale 15">
+            <a:extLst>
+              <a:ext uri="{FF2B5EF4-FFF2-40B4-BE49-F238E27FC236}">
+                <a16:creationId xmlns:a16="http://schemas.microsoft.com/office/drawing/2014/main" id="{CD09CDB2-64DB-0F0F-BE5C-54A2AA82F83F}"/>
+              </a:ext>
+            </a:extLst>
+          </p:cNvPr>
+          <p:cNvSpPr/>
+          <p:nvPr/>
+        </p:nvSpPr>
+        <p:spPr>
+          <a:xfrm>
+            <a:off x="10024842" y="1798829"/>
+            <a:ext cx="2098147" cy="914400"/>
+          </a:xfrm>
+          <a:prstGeom prst="ellipse">
+            <a:avLst/>
+          </a:prstGeom>
+        </p:spPr>
+        <p:style>
+          <a:lnRef idx="1">
+            <a:schemeClr val="accent4"/>
+          </a:lnRef>
+          <a:fillRef idx="2">
+            <a:schemeClr val="accent4"/>
+          </a:fillRef>
+          <a:effectRef idx="1">
+            <a:schemeClr val="accent4"/>
+          </a:effectRef>
+          <a:fontRef idx="minor">
+            <a:schemeClr val="dk1"/>
+          </a:fontRef>
+        </p:style>
+        <p:txBody>
+          <a:bodyPr rtlCol="0" anchor="ctr"/>
+          <a:lstStyle/>
+          <a:p>
+            <a:pPr algn="ctr"/>
+            <a:r>
+              <a:rPr lang="it-IT" dirty="0" err="1"/>
+              <a:t>Compressed</a:t>
+            </a:r>
+            <a:r>
+              <a:rPr lang="it-IT" dirty="0"/>
+              <a:t> ViT Model</a:t>
+            </a:r>
+          </a:p>
+        </p:txBody>
+      </p:sp>
+      <p:cxnSp>
+        <p:nvCxnSpPr>
+          <p:cNvPr id="24" name="Connettore 2 23">
+            <a:extLst>
+              <a:ext uri="{FF2B5EF4-FFF2-40B4-BE49-F238E27FC236}">
+                <a16:creationId xmlns:a16="http://schemas.microsoft.com/office/drawing/2014/main" id="{F429427D-EF6F-0F65-E1A4-3F436826EA45}"/>
+              </a:ext>
+            </a:extLst>
+          </p:cNvPr>
+          <p:cNvCxnSpPr>
+            <a:cxnSpLocks/>
+            <a:stCxn id="7" idx="3"/>
+            <a:endCxn id="16" idx="2"/>
+          </p:cNvCxnSpPr>
+          <p:nvPr/>
+        </p:nvCxnSpPr>
+        <p:spPr>
+          <a:xfrm>
+            <a:off x="9446147" y="2256029"/>
+            <a:ext cx="578695" cy="0"/>
+          </a:xfrm>
+          <a:prstGeom prst="straightConnector1">
+            <a:avLst/>
+          </a:prstGeom>
+          <a:ln>
+            <a:tailEnd type="triangle"/>
+          </a:ln>
+        </p:spPr>
+        <p:style>
+          <a:lnRef idx="2">
+            <a:schemeClr val="dk1"/>
+          </a:lnRef>
+          <a:fillRef idx="0">
+            <a:schemeClr val="dk1"/>
+          </a:fillRef>
+          <a:effectRef idx="1">
+            <a:schemeClr val="dk1"/>
+          </a:effectRef>
+          <a:fontRef idx="minor">
+            <a:schemeClr val="tx1"/>
+          </a:fontRef>
+        </p:style>
+      </p:cxnSp>
+      <p:cxnSp>
+        <p:nvCxnSpPr>
+          <p:cNvPr id="33" name="Connettore diritto 32">
+            <a:extLst>
+              <a:ext uri="{FF2B5EF4-FFF2-40B4-BE49-F238E27FC236}">
+                <a16:creationId xmlns:a16="http://schemas.microsoft.com/office/drawing/2014/main" id="{B3E35A5F-EE6B-766E-A36A-D1D645D18EBA}"/>
+              </a:ext>
+            </a:extLst>
+          </p:cNvPr>
+          <p:cNvCxnSpPr/>
+          <p:nvPr/>
+        </p:nvCxnSpPr>
+        <p:spPr>
+          <a:xfrm flipV="1">
+            <a:off x="9690961" y="864550"/>
+            <a:ext cx="0" cy="1391479"/>
+          </a:xfrm>
+          <a:prstGeom prst="line">
+            <a:avLst/>
+          </a:prstGeom>
+        </p:spPr>
+        <p:style>
+          <a:lnRef idx="2">
+            <a:schemeClr val="dk1"/>
+          </a:lnRef>
+          <a:fillRef idx="0">
+            <a:schemeClr val="dk1"/>
+          </a:fillRef>
+          <a:effectRef idx="1">
+            <a:schemeClr val="dk1"/>
+          </a:effectRef>
+          <a:fontRef idx="minor">
+            <a:schemeClr val="tx1"/>
+          </a:fontRef>
+        </p:style>
+      </p:cxnSp>
+      <p:cxnSp>
+        <p:nvCxnSpPr>
+          <p:cNvPr id="34" name="Connettore diritto 33">
+            <a:extLst>
+              <a:ext uri="{FF2B5EF4-FFF2-40B4-BE49-F238E27FC236}">
+                <a16:creationId xmlns:a16="http://schemas.microsoft.com/office/drawing/2014/main" id="{1DFA7A21-BCBF-F982-E16E-C30050C32E33}"/>
+              </a:ext>
+            </a:extLst>
+          </p:cNvPr>
+          <p:cNvCxnSpPr>
+            <a:cxnSpLocks/>
+          </p:cNvCxnSpPr>
+          <p:nvPr/>
+        </p:nvCxnSpPr>
+        <p:spPr>
+          <a:xfrm flipV="1">
+            <a:off x="2323051" y="864550"/>
+            <a:ext cx="0" cy="1391479"/>
+          </a:xfrm>
+          <a:prstGeom prst="line">
+            <a:avLst/>
+          </a:prstGeom>
+          <a:ln>
+            <a:headEnd type="triangle" w="med" len="med"/>
+            <a:tailEnd type="none" w="med" len="med"/>
+          </a:ln>
+        </p:spPr>
+        <p:style>
+          <a:lnRef idx="2">
+            <a:schemeClr val="dk1"/>
+          </a:lnRef>
+          <a:fillRef idx="0">
+            <a:schemeClr val="dk1"/>
+          </a:fillRef>
+          <a:effectRef idx="1">
+            <a:schemeClr val="dk1"/>
+          </a:effectRef>
+          <a:fontRef idx="minor">
+            <a:schemeClr val="tx1"/>
+          </a:fontRef>
+        </p:style>
+      </p:cxnSp>
+      <p:cxnSp>
+        <p:nvCxnSpPr>
+          <p:cNvPr id="38" name="Connettore diritto 37">
+            <a:extLst>
+              <a:ext uri="{FF2B5EF4-FFF2-40B4-BE49-F238E27FC236}">
+                <a16:creationId xmlns:a16="http://schemas.microsoft.com/office/drawing/2014/main" id="{9F1EEBF0-65B0-D32C-0F7A-AF5D99E19BB4}"/>
+              </a:ext>
+            </a:extLst>
+          </p:cNvPr>
+          <p:cNvCxnSpPr>
+            <a:cxnSpLocks/>
+          </p:cNvCxnSpPr>
+          <p:nvPr/>
+        </p:nvCxnSpPr>
+        <p:spPr>
+          <a:xfrm flipH="1">
+            <a:off x="2323051" y="864550"/>
+            <a:ext cx="7367910" cy="0"/>
+          </a:xfrm>
+          <a:prstGeom prst="line">
+            <a:avLst/>
+          </a:prstGeom>
+        </p:spPr>
+        <p:style>
+          <a:lnRef idx="2">
+            <a:schemeClr val="dk1"/>
+          </a:lnRef>
+          <a:fillRef idx="0">
+            <a:schemeClr val="dk1"/>
+          </a:fillRef>
+          <a:effectRef idx="1">
+            <a:schemeClr val="dk1"/>
+          </a:effectRef>
+          <a:fontRef idx="minor">
+            <a:schemeClr val="tx1"/>
+          </a:fontRef>
+        </p:style>
+      </p:cxnSp>
+      <p:sp>
+        <p:nvSpPr>
+          <p:cNvPr id="66" name="Rettangolo con angoli arrotondati 65">
+            <a:extLst>
+              <a:ext uri="{FF2B5EF4-FFF2-40B4-BE49-F238E27FC236}">
+                <a16:creationId xmlns:a16="http://schemas.microsoft.com/office/drawing/2014/main" id="{65556CCC-6C8B-2F5B-E6E2-6B314ED4339C}"/>
+              </a:ext>
+            </a:extLst>
+          </p:cNvPr>
+          <p:cNvSpPr/>
+          <p:nvPr/>
+        </p:nvSpPr>
+        <p:spPr>
+          <a:xfrm>
+            <a:off x="2649319" y="1743170"/>
+            <a:ext cx="1435008" cy="1025718"/>
+          </a:xfrm>
+          <a:prstGeom prst="roundRect">
+            <a:avLst/>
+          </a:prstGeom>
+        </p:spPr>
+        <p:style>
+          <a:lnRef idx="1">
+            <a:schemeClr val="accent6"/>
+          </a:lnRef>
+          <a:fillRef idx="2">
+            <a:schemeClr val="accent6"/>
+          </a:fillRef>
+          <a:effectRef idx="1">
+            <a:schemeClr val="accent6"/>
+          </a:effectRef>
+          <a:fontRef idx="minor">
+            <a:schemeClr val="dk1"/>
+          </a:fontRef>
+        </p:style>
+        <p:txBody>
+          <a:bodyPr rtlCol="0" anchor="ctr"/>
+          <a:lstStyle/>
+          <a:p>
+            <a:pPr algn="ctr"/>
+            <a:r>
+              <a:rPr lang="it-IT" dirty="0"/>
+              <a:t>Search Set Sampling</a:t>
+            </a:r>
+          </a:p>
+        </p:txBody>
+      </p:sp>
+      <p:cxnSp>
+        <p:nvCxnSpPr>
+          <p:cNvPr id="68" name="Connettore 2 67">
+            <a:extLst>
+              <a:ext uri="{FF2B5EF4-FFF2-40B4-BE49-F238E27FC236}">
+                <a16:creationId xmlns:a16="http://schemas.microsoft.com/office/drawing/2014/main" id="{166DF0B0-E802-ACAA-CF09-1082C793FA30}"/>
+              </a:ext>
+            </a:extLst>
+          </p:cNvPr>
+          <p:cNvCxnSpPr>
+            <a:cxnSpLocks/>
+            <a:stCxn id="15" idx="6"/>
+            <a:endCxn id="66" idx="1"/>
+          </p:cNvCxnSpPr>
+          <p:nvPr/>
+        </p:nvCxnSpPr>
+        <p:spPr>
+          <a:xfrm>
+            <a:off x="1968178" y="2256029"/>
+            <a:ext cx="681141" cy="0"/>
+          </a:xfrm>
+          <a:prstGeom prst="straightConnector1">
+            <a:avLst/>
+          </a:prstGeom>
+          <a:ln>
+            <a:tailEnd type="triangle"/>
+          </a:ln>
+        </p:spPr>
+        <p:style>
+          <a:lnRef idx="2">
+            <a:schemeClr val="dk1"/>
+          </a:lnRef>
+          <a:fillRef idx="0">
+            <a:schemeClr val="dk1"/>
+          </a:fillRef>
+          <a:effectRef idx="1">
+            <a:schemeClr val="dk1"/>
+          </a:effectRef>
+          <a:fontRef idx="minor">
+            <a:schemeClr val="tx1"/>
+          </a:fontRef>
+        </p:style>
+      </p:cxnSp>
+      <p:cxnSp>
+        <p:nvCxnSpPr>
+          <p:cNvPr id="70" name="Connettore 2 69">
+            <a:extLst>
+              <a:ext uri="{FF2B5EF4-FFF2-40B4-BE49-F238E27FC236}">
+                <a16:creationId xmlns:a16="http://schemas.microsoft.com/office/drawing/2014/main" id="{7D2FFE63-F127-3947-9475-AE3E4CCE12F1}"/>
+              </a:ext>
+            </a:extLst>
+          </p:cNvPr>
+          <p:cNvCxnSpPr>
+            <a:cxnSpLocks/>
+            <a:stCxn id="66" idx="3"/>
+            <a:endCxn id="5" idx="1"/>
+          </p:cNvCxnSpPr>
+          <p:nvPr/>
+        </p:nvCxnSpPr>
+        <p:spPr>
+          <a:xfrm flipV="1">
+            <a:off x="4084327" y="2252055"/>
+            <a:ext cx="380902" cy="3974"/>
+          </a:xfrm>
+          <a:prstGeom prst="straightConnector1">
+            <a:avLst/>
+          </a:prstGeom>
+          <a:ln>
+            <a:tailEnd type="triangle"/>
+          </a:ln>
+        </p:spPr>
+        <p:style>
+          <a:lnRef idx="2">
+            <a:schemeClr val="dk1"/>
+          </a:lnRef>
+          <a:fillRef idx="0">
+            <a:schemeClr val="dk1"/>
+          </a:fillRef>
+          <a:effectRef idx="1">
+            <a:schemeClr val="dk1"/>
+          </a:effectRef>
+          <a:fontRef idx="minor">
+            <a:schemeClr val="tx1"/>
+          </a:fontRef>
+        </p:style>
+      </p:cxnSp>
+      <p:sp>
+        <p:nvSpPr>
+          <p:cNvPr id="20" name="CasellaDiTesto 19">
+            <a:extLst>
+              <a:ext uri="{FF2B5EF4-FFF2-40B4-BE49-F238E27FC236}">
+                <a16:creationId xmlns:a16="http://schemas.microsoft.com/office/drawing/2014/main" id="{E67A939C-3786-19A5-D0BC-8046A9917FD2}"/>
+              </a:ext>
+            </a:extLst>
+          </p:cNvPr>
+          <p:cNvSpPr txBox="1"/>
+          <p:nvPr/>
+        </p:nvSpPr>
+        <p:spPr>
+          <a:xfrm>
+            <a:off x="2323050" y="507341"/>
+            <a:ext cx="7367910" cy="369332"/>
+          </a:xfrm>
+          <a:prstGeom prst="rect">
+            <a:avLst/>
+          </a:prstGeom>
+          <a:noFill/>
+        </p:spPr>
+        <p:txBody>
+          <a:bodyPr wrap="square" rtlCol="0">
+            <a:spAutoFit/>
+          </a:bodyPr>
+          <a:lstStyle/>
+          <a:p>
+            <a:pPr algn="ctr"/>
+            <a:r>
+              <a:rPr lang="it-IT" dirty="0">
+                <a:solidFill>
+                  <a:schemeClr val="dk1"/>
+                </a:solidFill>
+              </a:rPr>
+              <a:t>×N </a:t>
+            </a:r>
+            <a:r>
+              <a:rPr lang="it-IT" dirty="0" err="1">
+                <a:solidFill>
+                  <a:schemeClr val="dk1"/>
+                </a:solidFill>
+              </a:rPr>
+              <a:t>iterations</a:t>
+            </a:r>
+            <a:endParaRPr lang="it-IT" dirty="0">
+              <a:solidFill>
+                <a:schemeClr val="dk1"/>
+              </a:solidFill>
+            </a:endParaRPr>
+          </a:p>
+        </p:txBody>
+      </p:sp>
+      <p:grpSp>
+        <p:nvGrpSpPr>
+          <p:cNvPr id="48" name="Gruppo 47">
+            <a:extLst>
+              <a:ext uri="{FF2B5EF4-FFF2-40B4-BE49-F238E27FC236}">
+                <a16:creationId xmlns:a16="http://schemas.microsoft.com/office/drawing/2014/main" id="{28064074-96C6-43CF-4A7D-C3800DA1901A}"/>
+              </a:ext>
+            </a:extLst>
+          </p:cNvPr>
+          <p:cNvGrpSpPr/>
+          <p:nvPr/>
+        </p:nvGrpSpPr>
+        <p:grpSpPr>
+          <a:xfrm>
+            <a:off x="1308731" y="3722298"/>
+            <a:ext cx="2882269" cy="2408649"/>
+            <a:chOff x="1013456" y="3358838"/>
+            <a:chExt cx="4162283" cy="3317012"/>
+          </a:xfrm>
+        </p:grpSpPr>
+        <p:sp>
+          <p:nvSpPr>
+            <p:cNvPr id="35" name="Rettangolo 34">
+              <a:extLst>
+                <a:ext uri="{FF2B5EF4-FFF2-40B4-BE49-F238E27FC236}">
+                  <a16:creationId xmlns:a16="http://schemas.microsoft.com/office/drawing/2014/main" id="{69123536-6894-96C9-B300-33BEAC157DC1}"/>
+                </a:ext>
+              </a:extLst>
+            </p:cNvPr>
+            <p:cNvSpPr/>
+            <p:nvPr/>
+          </p:nvSpPr>
+          <p:spPr>
+            <a:xfrm>
+              <a:off x="1013456" y="3358838"/>
+              <a:ext cx="1960117" cy="952910"/>
+            </a:xfrm>
+            <a:prstGeom prst="rect">
+              <a:avLst/>
+            </a:prstGeom>
+          </p:spPr>
+          <p:style>
+            <a:lnRef idx="1">
+              <a:schemeClr val="accent2"/>
+            </a:lnRef>
+            <a:fillRef idx="2">
+              <a:schemeClr val="accent2"/>
+            </a:fillRef>
+            <a:effectRef idx="1">
+              <a:schemeClr val="accent2"/>
+            </a:effectRef>
+            <a:fontRef idx="minor">
+              <a:schemeClr val="dk1"/>
+            </a:fontRef>
+          </p:style>
+          <p:txBody>
+            <a:bodyPr rtlCol="0" anchor="ctr"/>
+            <a:lstStyle/>
+            <a:p>
+              <a:pPr algn="ctr"/>
+              <a:endParaRPr lang="it-IT"/>
+            </a:p>
+          </p:txBody>
+        </p:sp>
+        <p:sp>
+          <p:nvSpPr>
+            <p:cNvPr id="36" name="Rettangolo 35">
+              <a:extLst>
+                <a:ext uri="{FF2B5EF4-FFF2-40B4-BE49-F238E27FC236}">
+                  <a16:creationId xmlns:a16="http://schemas.microsoft.com/office/drawing/2014/main" id="{A3F21A74-0B5F-F2E3-D5B4-F732EFBC4003}"/>
+                </a:ext>
+              </a:extLst>
+            </p:cNvPr>
+            <p:cNvSpPr/>
+            <p:nvPr/>
+          </p:nvSpPr>
+          <p:spPr>
+            <a:xfrm>
+              <a:off x="1137038" y="3475916"/>
+              <a:ext cx="1960117" cy="952910"/>
+            </a:xfrm>
+            <a:prstGeom prst="rect">
+              <a:avLst/>
+            </a:prstGeom>
+          </p:spPr>
+          <p:style>
+            <a:lnRef idx="1">
+              <a:schemeClr val="accent2"/>
+            </a:lnRef>
+            <a:fillRef idx="2">
+              <a:schemeClr val="accent2"/>
+            </a:fillRef>
+            <a:effectRef idx="1">
+              <a:schemeClr val="accent2"/>
+            </a:effectRef>
+            <a:fontRef idx="minor">
+              <a:schemeClr val="dk1"/>
+            </a:fontRef>
+          </p:style>
+          <p:txBody>
+            <a:bodyPr rtlCol="0" anchor="ctr"/>
+            <a:lstStyle/>
+            <a:p>
+              <a:pPr algn="ctr"/>
+              <a:endParaRPr lang="it-IT"/>
+            </a:p>
+          </p:txBody>
+        </p:sp>
+        <p:sp>
+          <p:nvSpPr>
+            <p:cNvPr id="37" name="Rettangolo 36">
+              <a:extLst>
+                <a:ext uri="{FF2B5EF4-FFF2-40B4-BE49-F238E27FC236}">
+                  <a16:creationId xmlns:a16="http://schemas.microsoft.com/office/drawing/2014/main" id="{7AD49DF4-3BEB-A50D-78DF-23B03EE17D96}"/>
+                </a:ext>
+              </a:extLst>
+            </p:cNvPr>
+            <p:cNvSpPr/>
+            <p:nvPr/>
+          </p:nvSpPr>
+          <p:spPr>
+            <a:xfrm>
+              <a:off x="1260620" y="3592993"/>
+              <a:ext cx="1960117" cy="952910"/>
+            </a:xfrm>
+            <a:prstGeom prst="rect">
+              <a:avLst/>
+            </a:prstGeom>
+          </p:spPr>
+          <p:style>
+            <a:lnRef idx="1">
+              <a:schemeClr val="accent2"/>
+            </a:lnRef>
+            <a:fillRef idx="2">
+              <a:schemeClr val="accent2"/>
+            </a:fillRef>
+            <a:effectRef idx="1">
+              <a:schemeClr val="accent2"/>
+            </a:effectRef>
+            <a:fontRef idx="minor">
+              <a:schemeClr val="dk1"/>
+            </a:fontRef>
+          </p:style>
+          <p:txBody>
+            <a:bodyPr rtlCol="0" anchor="ctr"/>
+            <a:lstStyle/>
+            <a:p>
+              <a:pPr algn="ctr"/>
+              <a:endParaRPr lang="it-IT"/>
+            </a:p>
+          </p:txBody>
+        </p:sp>
+        <p:sp>
+          <p:nvSpPr>
+            <p:cNvPr id="39" name="Rettangolo 38">
+              <a:extLst>
+                <a:ext uri="{FF2B5EF4-FFF2-40B4-BE49-F238E27FC236}">
+                  <a16:creationId xmlns:a16="http://schemas.microsoft.com/office/drawing/2014/main" id="{6BB8A706-5565-6D69-CFCB-104077C493C5}"/>
+                </a:ext>
+              </a:extLst>
+            </p:cNvPr>
+            <p:cNvSpPr/>
+            <p:nvPr/>
+          </p:nvSpPr>
+          <p:spPr>
+            <a:xfrm>
+              <a:off x="1384202" y="3710071"/>
+              <a:ext cx="1960117" cy="952910"/>
+            </a:xfrm>
+            <a:prstGeom prst="rect">
+              <a:avLst/>
+            </a:prstGeom>
+          </p:spPr>
+          <p:style>
+            <a:lnRef idx="1">
+              <a:schemeClr val="accent2"/>
+            </a:lnRef>
+            <a:fillRef idx="2">
+              <a:schemeClr val="accent2"/>
+            </a:fillRef>
+            <a:effectRef idx="1">
+              <a:schemeClr val="accent2"/>
+            </a:effectRef>
+            <a:fontRef idx="minor">
+              <a:schemeClr val="dk1"/>
+            </a:fontRef>
+          </p:style>
+          <p:txBody>
+            <a:bodyPr rtlCol="0" anchor="ctr"/>
+            <a:lstStyle/>
+            <a:p>
+              <a:pPr algn="ctr"/>
+              <a:r>
+                <a:rPr lang="it-IT" dirty="0"/>
+                <a:t>Train Set</a:t>
+              </a:r>
+            </a:p>
+          </p:txBody>
+        </p:sp>
+        <p:sp>
+          <p:nvSpPr>
+            <p:cNvPr id="40" name="Rettangolo 39">
+              <a:extLst>
+                <a:ext uri="{FF2B5EF4-FFF2-40B4-BE49-F238E27FC236}">
+                  <a16:creationId xmlns:a16="http://schemas.microsoft.com/office/drawing/2014/main" id="{B30B2F2A-2060-DD92-EAE2-4521DD2D76DC}"/>
+                </a:ext>
+              </a:extLst>
+            </p:cNvPr>
+            <p:cNvSpPr/>
+            <p:nvPr/>
+          </p:nvSpPr>
+          <p:spPr>
+            <a:xfrm>
+              <a:off x="1013456" y="5371707"/>
+              <a:ext cx="1960117" cy="952910"/>
+            </a:xfrm>
+            <a:prstGeom prst="rect">
+              <a:avLst/>
+            </a:prstGeom>
+          </p:spPr>
+          <p:style>
+            <a:lnRef idx="1">
+              <a:schemeClr val="accent1"/>
+            </a:lnRef>
+            <a:fillRef idx="2">
+              <a:schemeClr val="accent1"/>
+            </a:fillRef>
+            <a:effectRef idx="1">
+              <a:schemeClr val="accent1"/>
+            </a:effectRef>
+            <a:fontRef idx="minor">
+              <a:schemeClr val="dk1"/>
+            </a:fontRef>
+          </p:style>
+          <p:txBody>
+            <a:bodyPr rtlCol="0" anchor="ctr"/>
+            <a:lstStyle/>
+            <a:p>
+              <a:pPr algn="ctr"/>
+              <a:endParaRPr lang="it-IT"/>
+            </a:p>
+          </p:txBody>
+        </p:sp>
+        <p:sp>
+          <p:nvSpPr>
+            <p:cNvPr id="41" name="Rettangolo 40">
+              <a:extLst>
+                <a:ext uri="{FF2B5EF4-FFF2-40B4-BE49-F238E27FC236}">
+                  <a16:creationId xmlns:a16="http://schemas.microsoft.com/office/drawing/2014/main" id="{0B44E2BA-16A8-EEB7-D857-578F9D263A63}"/>
+                </a:ext>
+              </a:extLst>
+            </p:cNvPr>
+            <p:cNvSpPr/>
+            <p:nvPr/>
+          </p:nvSpPr>
+          <p:spPr>
+            <a:xfrm>
+              <a:off x="1137038" y="5488785"/>
+              <a:ext cx="1960117" cy="952910"/>
+            </a:xfrm>
+            <a:prstGeom prst="rect">
+              <a:avLst/>
+            </a:prstGeom>
+          </p:spPr>
+          <p:style>
+            <a:lnRef idx="1">
+              <a:schemeClr val="accent1"/>
+            </a:lnRef>
+            <a:fillRef idx="2">
+              <a:schemeClr val="accent1"/>
+            </a:fillRef>
+            <a:effectRef idx="1">
+              <a:schemeClr val="accent1"/>
+            </a:effectRef>
+            <a:fontRef idx="minor">
+              <a:schemeClr val="dk1"/>
+            </a:fontRef>
+          </p:style>
+          <p:txBody>
+            <a:bodyPr rtlCol="0" anchor="ctr"/>
+            <a:lstStyle/>
+            <a:p>
+              <a:pPr algn="ctr"/>
+              <a:endParaRPr lang="it-IT"/>
+            </a:p>
+          </p:txBody>
+        </p:sp>
+        <p:sp>
+          <p:nvSpPr>
+            <p:cNvPr id="42" name="Rettangolo 41">
+              <a:extLst>
+                <a:ext uri="{FF2B5EF4-FFF2-40B4-BE49-F238E27FC236}">
+                  <a16:creationId xmlns:a16="http://schemas.microsoft.com/office/drawing/2014/main" id="{5F6EB41B-4AB8-8805-DA86-2D1467FB80ED}"/>
+                </a:ext>
+              </a:extLst>
+            </p:cNvPr>
+            <p:cNvSpPr/>
+            <p:nvPr/>
+          </p:nvSpPr>
+          <p:spPr>
+            <a:xfrm>
+              <a:off x="1260620" y="5605862"/>
+              <a:ext cx="1960117" cy="952910"/>
+            </a:xfrm>
+            <a:prstGeom prst="rect">
+              <a:avLst/>
+            </a:prstGeom>
+          </p:spPr>
+          <p:style>
+            <a:lnRef idx="1">
+              <a:schemeClr val="accent1"/>
+            </a:lnRef>
+            <a:fillRef idx="2">
+              <a:schemeClr val="accent1"/>
+            </a:fillRef>
+            <a:effectRef idx="1">
+              <a:schemeClr val="accent1"/>
+            </a:effectRef>
+            <a:fontRef idx="minor">
+              <a:schemeClr val="dk1"/>
+            </a:fontRef>
+          </p:style>
+          <p:txBody>
+            <a:bodyPr rtlCol="0" anchor="ctr"/>
+            <a:lstStyle/>
+            <a:p>
+              <a:pPr algn="ctr"/>
+              <a:endParaRPr lang="it-IT"/>
+            </a:p>
+          </p:txBody>
+        </p:sp>
+        <p:sp>
+          <p:nvSpPr>
+            <p:cNvPr id="43" name="Rettangolo 42">
+              <a:extLst>
+                <a:ext uri="{FF2B5EF4-FFF2-40B4-BE49-F238E27FC236}">
+                  <a16:creationId xmlns:a16="http://schemas.microsoft.com/office/drawing/2014/main" id="{97A556FF-9FF6-24A8-DA6F-839FBA712B3A}"/>
+                </a:ext>
+              </a:extLst>
+            </p:cNvPr>
+            <p:cNvSpPr/>
+            <p:nvPr/>
+          </p:nvSpPr>
+          <p:spPr>
+            <a:xfrm>
+              <a:off x="1384202" y="5722940"/>
+              <a:ext cx="1960117" cy="952910"/>
+            </a:xfrm>
+            <a:prstGeom prst="rect">
+              <a:avLst/>
+            </a:prstGeom>
+          </p:spPr>
+          <p:style>
+            <a:lnRef idx="1">
+              <a:schemeClr val="accent1"/>
+            </a:lnRef>
+            <a:fillRef idx="2">
+              <a:schemeClr val="accent1"/>
+            </a:fillRef>
+            <a:effectRef idx="1">
+              <a:schemeClr val="accent1"/>
+            </a:effectRef>
+            <a:fontRef idx="minor">
+              <a:schemeClr val="dk1"/>
+            </a:fontRef>
+          </p:style>
+          <p:txBody>
+            <a:bodyPr rtlCol="0" anchor="ctr"/>
+            <a:lstStyle/>
+            <a:p>
+              <a:pPr algn="ctr"/>
+              <a:r>
+                <a:rPr lang="it-IT" dirty="0" err="1"/>
+                <a:t>Search</a:t>
+              </a:r>
+              <a:r>
+                <a:rPr lang="it-IT" dirty="0"/>
+                <a:t> Set</a:t>
+              </a:r>
+            </a:p>
+          </p:txBody>
+        </p:sp>
+        <p:sp>
+          <p:nvSpPr>
+            <p:cNvPr id="44" name="Freccia circolare in su 43">
+              <a:extLst>
+                <a:ext uri="{FF2B5EF4-FFF2-40B4-BE49-F238E27FC236}">
+                  <a16:creationId xmlns:a16="http://schemas.microsoft.com/office/drawing/2014/main" id="{775B77C2-4421-B378-A2EC-769DD52E4BCF}"/>
+                </a:ext>
+              </a:extLst>
+            </p:cNvPr>
+            <p:cNvSpPr/>
+            <p:nvPr/>
+          </p:nvSpPr>
+          <p:spPr>
+            <a:xfrm>
+              <a:off x="2010133" y="5038783"/>
+              <a:ext cx="477710" cy="218655"/>
+            </a:xfrm>
+            <a:prstGeom prst="curvedUpArrow">
+              <a:avLst/>
+            </a:prstGeom>
+          </p:spPr>
+          <p:style>
+            <a:lnRef idx="2">
+              <a:schemeClr val="dk1">
+                <a:shade val="15000"/>
+              </a:schemeClr>
+            </a:lnRef>
+            <a:fillRef idx="1">
+              <a:schemeClr val="dk1"/>
+            </a:fillRef>
+            <a:effectRef idx="0">
+              <a:schemeClr val="dk1"/>
+            </a:effectRef>
+            <a:fontRef idx="minor">
+              <a:schemeClr val="lt1"/>
+            </a:fontRef>
+          </p:style>
+          <p:txBody>
+            <a:bodyPr rtlCol="0" anchor="ctr"/>
+            <a:lstStyle/>
+            <a:p>
+              <a:pPr algn="ctr"/>
+              <a:endParaRPr lang="it-IT">
+                <a:solidFill>
+                  <a:schemeClr val="tx1"/>
+                </a:solidFill>
+              </a:endParaRPr>
+            </a:p>
+          </p:txBody>
+        </p:sp>
+        <p:sp>
+          <p:nvSpPr>
+            <p:cNvPr id="45" name="Freccia circolare in su 44">
+              <a:extLst>
+                <a:ext uri="{FF2B5EF4-FFF2-40B4-BE49-F238E27FC236}">
+                  <a16:creationId xmlns:a16="http://schemas.microsoft.com/office/drawing/2014/main" id="{820BE870-6C1A-D244-CB9E-77EBFE3D40CE}"/>
+                </a:ext>
+              </a:extLst>
+            </p:cNvPr>
+            <p:cNvSpPr/>
+            <p:nvPr/>
+          </p:nvSpPr>
+          <p:spPr>
+            <a:xfrm flipH="1" flipV="1">
+              <a:off x="2002759" y="4777249"/>
+              <a:ext cx="477710" cy="218654"/>
+            </a:xfrm>
+            <a:prstGeom prst="curvedUpArrow">
+              <a:avLst/>
+            </a:prstGeom>
+          </p:spPr>
+          <p:style>
+            <a:lnRef idx="2">
+              <a:schemeClr val="dk1">
+                <a:shade val="15000"/>
+              </a:schemeClr>
+            </a:lnRef>
+            <a:fillRef idx="1">
+              <a:schemeClr val="dk1"/>
+            </a:fillRef>
+            <a:effectRef idx="0">
+              <a:schemeClr val="dk1"/>
+            </a:effectRef>
+            <a:fontRef idx="minor">
+              <a:schemeClr val="lt1"/>
+            </a:fontRef>
+          </p:style>
+          <p:txBody>
+            <a:bodyPr rtlCol="0" anchor="ctr"/>
+            <a:lstStyle/>
+            <a:p>
+              <a:pPr algn="ctr"/>
+              <a:endParaRPr lang="it-IT">
+                <a:solidFill>
+                  <a:schemeClr val="tx1"/>
+                </a:solidFill>
+              </a:endParaRPr>
+            </a:p>
+          </p:txBody>
+        </p:sp>
+        <p:sp>
+          <p:nvSpPr>
+            <p:cNvPr id="46" name="CasellaDiTesto 45">
+              <a:extLst>
+                <a:ext uri="{FF2B5EF4-FFF2-40B4-BE49-F238E27FC236}">
+                  <a16:creationId xmlns:a16="http://schemas.microsoft.com/office/drawing/2014/main" id="{8DB9D2FF-A577-3598-8FF6-02D6E8CE5B82}"/>
+                </a:ext>
+              </a:extLst>
+            </p:cNvPr>
+            <p:cNvSpPr txBox="1"/>
+            <p:nvPr/>
+          </p:nvSpPr>
+          <p:spPr>
+            <a:xfrm>
+              <a:off x="2587255" y="4874740"/>
+              <a:ext cx="2588484" cy="338554"/>
+            </a:xfrm>
+            <a:prstGeom prst="rect">
+              <a:avLst/>
+            </a:prstGeom>
+            <a:noFill/>
+          </p:spPr>
+          <p:txBody>
+            <a:bodyPr wrap="square" rtlCol="0">
+              <a:spAutoFit/>
+            </a:bodyPr>
+            <a:lstStyle/>
+            <a:p>
+              <a:r>
+                <a:rPr lang="it-IT" sz="1600" b="1" dirty="0"/>
+                <a:t>Sampling</a:t>
+              </a:r>
+            </a:p>
+          </p:txBody>
+        </p:sp>
+      </p:grpSp>
+      <p:cxnSp>
+        <p:nvCxnSpPr>
+          <p:cNvPr id="50" name="Connettore diritto 49">
+            <a:extLst>
+              <a:ext uri="{FF2B5EF4-FFF2-40B4-BE49-F238E27FC236}">
+                <a16:creationId xmlns:a16="http://schemas.microsoft.com/office/drawing/2014/main" id="{D6D89551-340F-A644-1335-26272CC341AE}"/>
+              </a:ext>
+            </a:extLst>
+          </p:cNvPr>
+          <p:cNvCxnSpPr>
+            <a:cxnSpLocks/>
+          </p:cNvCxnSpPr>
+          <p:nvPr/>
+        </p:nvCxnSpPr>
+        <p:spPr>
+          <a:xfrm flipH="1">
+            <a:off x="2158549" y="2892004"/>
+            <a:ext cx="1136223" cy="754094"/>
+          </a:xfrm>
+          <a:prstGeom prst="line">
+            <a:avLst/>
+          </a:prstGeom>
+          <a:ln w="12700">
+            <a:headEnd type="none" w="med" len="med"/>
+            <a:tailEnd type="arrow" w="med" len="med"/>
+          </a:ln>
+        </p:spPr>
+        <p:style>
+          <a:lnRef idx="2">
+            <a:schemeClr val="dk1"/>
+          </a:lnRef>
+          <a:fillRef idx="0">
+            <a:schemeClr val="dk1"/>
+          </a:fillRef>
+          <a:effectRef idx="1">
+            <a:schemeClr val="dk1"/>
+          </a:effectRef>
+          <a:fontRef idx="minor">
+            <a:schemeClr val="tx1"/>
+          </a:fontRef>
+        </p:style>
+      </p:cxnSp>
+      <p:pic>
+        <p:nvPicPr>
+          <p:cNvPr id="53" name="Immagine 52">
+            <a:extLst>
+              <a:ext uri="{FF2B5EF4-FFF2-40B4-BE49-F238E27FC236}">
+                <a16:creationId xmlns:a16="http://schemas.microsoft.com/office/drawing/2014/main" id="{6A9A727E-BD0E-5BEF-19E6-01558D6EECD7}"/>
+              </a:ext>
+            </a:extLst>
+          </p:cNvPr>
+          <p:cNvPicPr>
+            <a:picLocks noChangeAspect="1"/>
+          </p:cNvPicPr>
+          <p:nvPr/>
+        </p:nvPicPr>
+        <p:blipFill>
+          <a:blip r:embed="rId3">
+            <a:extLst>
+              <a:ext uri="{28A0092B-C50C-407E-A947-70E740481C1C}">
+                <a14:useLocalDpi xmlns:a14="http://schemas.microsoft.com/office/drawing/2010/main" val="0"/>
+              </a:ext>
+            </a:extLst>
+          </a:blip>
+          <a:stretch>
+            <a:fillRect/>
+          </a:stretch>
+        </p:blipFill>
+        <p:spPr>
+          <a:xfrm>
+            <a:off x="4787498" y="3515680"/>
+            <a:ext cx="3421750" cy="2619241"/>
+          </a:xfrm>
+          <a:prstGeom prst="rect">
+            <a:avLst/>
+          </a:prstGeom>
+        </p:spPr>
+      </p:pic>
+      <p:cxnSp>
+        <p:nvCxnSpPr>
+          <p:cNvPr id="54" name="Connettore diritto 53">
+            <a:extLst>
+              <a:ext uri="{FF2B5EF4-FFF2-40B4-BE49-F238E27FC236}">
+                <a16:creationId xmlns:a16="http://schemas.microsoft.com/office/drawing/2014/main" id="{E92D6B02-53E8-2A7E-C0F7-417EF7EFC596}"/>
+              </a:ext>
+            </a:extLst>
+          </p:cNvPr>
+          <p:cNvCxnSpPr>
+            <a:cxnSpLocks/>
+          </p:cNvCxnSpPr>
+          <p:nvPr/>
+        </p:nvCxnSpPr>
+        <p:spPr>
+          <a:xfrm>
+            <a:off x="5094510" y="2892004"/>
+            <a:ext cx="1136223" cy="754094"/>
+          </a:xfrm>
+          <a:prstGeom prst="line">
+            <a:avLst/>
+          </a:prstGeom>
+          <a:ln w="12700">
+            <a:headEnd type="none" w="med" len="med"/>
+            <a:tailEnd type="arrow" w="med" len="med"/>
+          </a:ln>
+        </p:spPr>
+        <p:style>
+          <a:lnRef idx="2">
+            <a:schemeClr val="dk1"/>
+          </a:lnRef>
+          <a:fillRef idx="0">
+            <a:schemeClr val="dk1"/>
+          </a:fillRef>
+          <a:effectRef idx="1">
+            <a:schemeClr val="dk1"/>
+          </a:effectRef>
+          <a:fontRef idx="minor">
+            <a:schemeClr val="tx1"/>
+          </a:fontRef>
+        </p:style>
+      </p:cxnSp>
+    </p:spTree>
+    <p:extLst>
+      <p:ext uri="{BB962C8B-B14F-4D97-AF65-F5344CB8AC3E}">
+        <p14:creationId xmlns:p14="http://schemas.microsoft.com/office/powerpoint/2010/main" val="3608667371"/>
+      </p:ext>
+    </p:extLst>
+  </p:cSld>
+  <p:clrMapOvr>
+    <a:masterClrMapping/>
+  </p:clrMapOvr>
+</p:sld>
+</file>
+
+<file path=ppt/slides/slide3.xml><?xml version="1.0" encoding="utf-8"?>
+<p:sld xmlns:a="http://schemas.openxmlformats.org/drawingml/2006/main" xmlns:r="http://schemas.openxmlformats.org/officeDocument/2006/relationships" xmlns:p="http://schemas.openxmlformats.org/presentationml/2006/main">
+  <p:cSld>
+    <p:spTree>
+      <p:nvGrpSpPr>
+        <p:cNvPr id="1" name="">
+          <a:extLst>
+            <a:ext uri="{FF2B5EF4-FFF2-40B4-BE49-F238E27FC236}">
               <a16:creationId xmlns:a16="http://schemas.microsoft.com/office/drawing/2014/main" id="{28BD17AB-D6BF-B1A8-E4EC-2ECBCEEDA8C5}"/>
             </a:ext>
           </a:extLst>
@@ -4424,7 +6226,7 @@
 </p:sld>
 </file>
 
-<file path=ppt/slides/slide3.xml><?xml version="1.0" encoding="utf-8"?>
+<file path=ppt/slides/slide4.xml><?xml version="1.0" encoding="utf-8"?>
 <p:sld xmlns:a="http://schemas.openxmlformats.org/drawingml/2006/main" xmlns:r="http://schemas.openxmlformats.org/officeDocument/2006/relationships" xmlns:p="http://schemas.openxmlformats.org/presentationml/2006/main">
   <p:cSld>
     <p:spTree>
@@ -6237,4 +8039,319 @@
     </a:ext>
   </a:extLst>
 </a:theme>
+</file>
+
+<file path=ppt/theme/theme2.xml><?xml version="1.0" encoding="utf-8"?>
+<a:theme xmlns:a="http://schemas.openxmlformats.org/drawingml/2006/main" name="Tema di Office">
+  <a:themeElements>
+    <a:clrScheme name="Office">
+      <a:dk1>
+        <a:sysClr val="windowText" lastClr="000000"/>
+      </a:dk1>
+      <a:lt1>
+        <a:sysClr val="window" lastClr="FFFFFF"/>
+      </a:lt1>
+      <a:dk2>
+        <a:srgbClr val="0E2841"/>
+      </a:dk2>
+      <a:lt2>
+        <a:srgbClr val="E8E8E8"/>
+      </a:lt2>
+      <a:accent1>
+        <a:srgbClr val="156082"/>
+      </a:accent1>
+      <a:accent2>
+        <a:srgbClr val="E97132"/>
+      </a:accent2>
+      <a:accent3>
+        <a:srgbClr val="196B24"/>
+      </a:accent3>
+      <a:accent4>
+        <a:srgbClr val="0F9ED5"/>
+      </a:accent4>
+      <a:accent5>
+        <a:srgbClr val="A02B93"/>
+      </a:accent5>
+      <a:accent6>
+        <a:srgbClr val="4EA72E"/>
+      </a:accent6>
+      <a:hlink>
+        <a:srgbClr val="467886"/>
+      </a:hlink>
+      <a:folHlink>
+        <a:srgbClr val="96607D"/>
+      </a:folHlink>
+    </a:clrScheme>
+    <a:fontScheme name="Office">
+      <a:majorFont>
+        <a:latin typeface="Aptos Display" panose="02110004020202020204"/>
+        <a:ea typeface=""/>
+        <a:cs typeface=""/>
+        <a:font script="Jpan" typeface="游ゴシック Light"/>
+        <a:font script="Hang" typeface="맑은 고딕"/>
+        <a:font script="Hans" typeface="等线 Light"/>
+        <a:font script="Hant" typeface="新細明體"/>
+        <a:font script="Arab" typeface="Times New Roman"/>
+        <a:font script="Hebr" typeface="Times New Roman"/>
+        <a:font script="Thai" typeface="Angsana New"/>
+        <a:font script="Ethi" typeface="Nyala"/>
+        <a:font script="Beng" typeface="Vrinda"/>
+        <a:font script="Gujr" typeface="Shruti"/>
+        <a:font script="Khmr" typeface="MoolBoran"/>
+        <a:font script="Knda" typeface="Tunga"/>
+        <a:font script="Guru" typeface="Raavi"/>
+        <a:font script="Cans" typeface="Euphemia"/>
+        <a:font script="Cher" typeface="Plantagenet Cherokee"/>
+        <a:font script="Yiii" typeface="Microsoft Yi Baiti"/>
+        <a:font script="Tibt" typeface="Microsoft Himalaya"/>
+        <a:font script="Thaa" typeface="MV Boli"/>
+        <a:font script="Deva" typeface="Mangal"/>
+        <a:font script="Telu" typeface="Gautami"/>
+        <a:font script="Taml" typeface="Latha"/>
+        <a:font script="Syrc" typeface="Estrangelo Edessa"/>
+        <a:font script="Orya" typeface="Kalinga"/>
+        <a:font script="Mlym" typeface="Kartika"/>
+        <a:font script="Laoo" typeface="DokChampa"/>
+        <a:font script="Sinh" typeface="Iskoola Pota"/>
+        <a:font script="Mong" typeface="Mongolian Baiti"/>
+        <a:font script="Viet" typeface="Times New Roman"/>
+        <a:font script="Uigh" typeface="Microsoft Uighur"/>
+        <a:font script="Geor" typeface="Sylfaen"/>
+        <a:font script="Armn" typeface="Arial"/>
+        <a:font script="Bugi" typeface="Leelawadee UI"/>
+        <a:font script="Bopo" typeface="Microsoft JhengHei"/>
+        <a:font script="Java" typeface="Javanese Text"/>
+        <a:font script="Lisu" typeface="Segoe UI"/>
+        <a:font script="Mymr" typeface="Myanmar Text"/>
+        <a:font script="Nkoo" typeface="Ebrima"/>
+        <a:font script="Olck" typeface="Nirmala UI"/>
+        <a:font script="Osma" typeface="Ebrima"/>
+        <a:font script="Phag" typeface="Phagspa"/>
+        <a:font script="Syrn" typeface="Estrangelo Edessa"/>
+        <a:font script="Syrj" typeface="Estrangelo Edessa"/>
+        <a:font script="Syre" typeface="Estrangelo Edessa"/>
+        <a:font script="Sora" typeface="Nirmala UI"/>
+        <a:font script="Tale" typeface="Microsoft Tai Le"/>
+        <a:font script="Talu" typeface="Microsoft New Tai Lue"/>
+        <a:font script="Tfng" typeface="Ebrima"/>
+      </a:majorFont>
+      <a:minorFont>
+        <a:latin typeface="Aptos" panose="02110004020202020204"/>
+        <a:ea typeface=""/>
+        <a:cs typeface=""/>
+        <a:font script="Jpan" typeface="游ゴシック"/>
+        <a:font script="Hang" typeface="맑은 고딕"/>
+        <a:font script="Hans" typeface="等线"/>
+        <a:font script="Hant" typeface="新細明體"/>
+        <a:font script="Arab" typeface="Arial"/>
+        <a:font script="Hebr" typeface="Arial"/>
+        <a:font script="Thai" typeface="Cordia New"/>
+        <a:font script="Ethi" typeface="Nyala"/>
+        <a:font script="Beng" typeface="Vrinda"/>
+        <a:font script="Gujr" typeface="Shruti"/>
+        <a:font script="Khmr" typeface="DaunPenh"/>
+        <a:font script="Knda" typeface="Tunga"/>
+        <a:font script="Guru" typeface="Raavi"/>
+        <a:font script="Cans" typeface="Euphemia"/>
+        <a:font script="Cher" typeface="Plantagenet Cherokee"/>
+        <a:font script="Yiii" typeface="Microsoft Yi Baiti"/>
+        <a:font script="Tibt" typeface="Microsoft Himalaya"/>
+        <a:font script="Thaa" typeface="MV Boli"/>
+        <a:font script="Deva" typeface="Mangal"/>
+        <a:font script="Telu" typeface="Gautami"/>
+        <a:font script="Taml" typeface="Latha"/>
+        <a:font script="Syrc" typeface="Estrangelo Edessa"/>
+        <a:font script="Orya" typeface="Kalinga"/>
+        <a:font script="Mlym" typeface="Kartika"/>
+        <a:font script="Laoo" typeface="DokChampa"/>
+        <a:font script="Sinh" typeface="Iskoola Pota"/>
+        <a:font script="Mong" typeface="Mongolian Baiti"/>
+        <a:font script="Viet" typeface="Arial"/>
+        <a:font script="Uigh" typeface="Microsoft Uighur"/>
+        <a:font script="Geor" typeface="Sylfaen"/>
+        <a:font script="Armn" typeface="Arial"/>
+        <a:font script="Bugi" typeface="Leelawadee UI"/>
+        <a:font script="Bopo" typeface="Microsoft JhengHei"/>
+        <a:font script="Java" typeface="Javanese Text"/>
+        <a:font script="Lisu" typeface="Segoe UI"/>
+        <a:font script="Mymr" typeface="Myanmar Text"/>
+        <a:font script="Nkoo" typeface="Ebrima"/>
+        <a:font script="Olck" typeface="Nirmala UI"/>
+        <a:font script="Osma" typeface="Ebrima"/>
+        <a:font script="Phag" typeface="Phagspa"/>
+        <a:font script="Syrn" typeface="Estrangelo Edessa"/>
+        <a:font script="Syrj" typeface="Estrangelo Edessa"/>
+        <a:font script="Syre" typeface="Estrangelo Edessa"/>
+        <a:font script="Sora" typeface="Nirmala UI"/>
+        <a:font script="Tale" typeface="Microsoft Tai Le"/>
+        <a:font script="Talu" typeface="Microsoft New Tai Lue"/>
+        <a:font script="Tfng" typeface="Ebrima"/>
+      </a:minorFont>
+    </a:fontScheme>
+    <a:fmtScheme name="Office">
+      <a:fillStyleLst>
+        <a:solidFill>
+          <a:schemeClr val="phClr"/>
+        </a:solidFill>
+        <a:gradFill rotWithShape="1">
+          <a:gsLst>
+            <a:gs pos="0">
+              <a:schemeClr val="phClr">
+                <a:lumMod val="110000"/>
+                <a:satMod val="105000"/>
+                <a:tint val="67000"/>
+              </a:schemeClr>
+            </a:gs>
+            <a:gs pos="50000">
+              <a:schemeClr val="phClr">
+                <a:lumMod val="105000"/>
+                <a:satMod val="103000"/>
+                <a:tint val="73000"/>
+              </a:schemeClr>
+            </a:gs>
+            <a:gs pos="100000">
+              <a:schemeClr val="phClr">
+                <a:lumMod val="105000"/>
+                <a:satMod val="109000"/>
+                <a:tint val="81000"/>
+              </a:schemeClr>
+            </a:gs>
+          </a:gsLst>
+          <a:lin ang="5400000" scaled="0"/>
+        </a:gradFill>
+        <a:gradFill rotWithShape="1">
+          <a:gsLst>
+            <a:gs pos="0">
+              <a:schemeClr val="phClr">
+                <a:satMod val="103000"/>
+                <a:lumMod val="102000"/>
+                <a:tint val="94000"/>
+              </a:schemeClr>
+            </a:gs>
+            <a:gs pos="50000">
+              <a:schemeClr val="phClr">
+                <a:satMod val="110000"/>
+                <a:lumMod val="100000"/>
+                <a:shade val="100000"/>
+              </a:schemeClr>
+            </a:gs>
+            <a:gs pos="100000">
+              <a:schemeClr val="phClr">
+                <a:lumMod val="99000"/>
+                <a:satMod val="120000"/>
+                <a:shade val="78000"/>
+              </a:schemeClr>
+            </a:gs>
+          </a:gsLst>
+          <a:lin ang="5400000" scaled="0"/>
+        </a:gradFill>
+      </a:fillStyleLst>
+      <a:lnStyleLst>
+        <a:ln w="12700" cap="flat" cmpd="sng" algn="ctr">
+          <a:solidFill>
+            <a:schemeClr val="phClr"/>
+          </a:solidFill>
+          <a:prstDash val="solid"/>
+          <a:miter lim="800000"/>
+        </a:ln>
+        <a:ln w="19050" cap="flat" cmpd="sng" algn="ctr">
+          <a:solidFill>
+            <a:schemeClr val="phClr"/>
+          </a:solidFill>
+          <a:prstDash val="solid"/>
+          <a:miter lim="800000"/>
+        </a:ln>
+        <a:ln w="25400" cap="flat" cmpd="sng" algn="ctr">
+          <a:solidFill>
+            <a:schemeClr val="phClr"/>
+          </a:solidFill>
+          <a:prstDash val="solid"/>
+          <a:miter lim="800000"/>
+        </a:ln>
+      </a:lnStyleLst>
+      <a:effectStyleLst>
+        <a:effectStyle>
+          <a:effectLst/>
+        </a:effectStyle>
+        <a:effectStyle>
+          <a:effectLst/>
+        </a:effectStyle>
+        <a:effectStyle>
+          <a:effectLst>
+            <a:outerShdw blurRad="57150" dist="19050" dir="5400000" algn="ctr" rotWithShape="0">
+              <a:srgbClr val="000000">
+                <a:alpha val="63000"/>
+              </a:srgbClr>
+            </a:outerShdw>
+          </a:effectLst>
+        </a:effectStyle>
+      </a:effectStyleLst>
+      <a:bgFillStyleLst>
+        <a:solidFill>
+          <a:schemeClr val="phClr"/>
+        </a:solidFill>
+        <a:solidFill>
+          <a:schemeClr val="phClr">
+            <a:tint val="95000"/>
+            <a:satMod val="170000"/>
+          </a:schemeClr>
+        </a:solidFill>
+        <a:gradFill rotWithShape="1">
+          <a:gsLst>
+            <a:gs pos="0">
+              <a:schemeClr val="phClr">
+                <a:tint val="93000"/>
+                <a:satMod val="150000"/>
+                <a:shade val="98000"/>
+                <a:lumMod val="102000"/>
+              </a:schemeClr>
+            </a:gs>
+            <a:gs pos="50000">
+              <a:schemeClr val="phClr">
+                <a:tint val="98000"/>
+                <a:satMod val="130000"/>
+                <a:shade val="90000"/>
+                <a:lumMod val="103000"/>
+              </a:schemeClr>
+            </a:gs>
+            <a:gs pos="100000">
+              <a:schemeClr val="phClr">
+                <a:shade val="63000"/>
+                <a:satMod val="120000"/>
+              </a:schemeClr>
+            </a:gs>
+          </a:gsLst>
+          <a:lin ang="5400000" scaled="0"/>
+        </a:gradFill>
+      </a:bgFillStyleLst>
+    </a:fmtScheme>
+  </a:themeElements>
+  <a:objectDefaults>
+    <a:lnDef>
+      <a:spPr/>
+      <a:bodyPr/>
+      <a:lstStyle/>
+      <a:style>
+        <a:lnRef idx="2">
+          <a:schemeClr val="accent1"/>
+        </a:lnRef>
+        <a:fillRef idx="0">
+          <a:schemeClr val="accent1"/>
+        </a:fillRef>
+        <a:effectRef idx="1">
+          <a:schemeClr val="accent1"/>
+        </a:effectRef>
+        <a:fontRef idx="minor">
+          <a:schemeClr val="tx1"/>
+        </a:fontRef>
+      </a:style>
+    </a:lnDef>
+  </a:objectDefaults>
+  <a:extraClrSchemeLst/>
+  <a:extLst>
+    <a:ext uri="{05A4C25C-085E-4340-85A3-A5531E510DB2}">
+      <thm15:themeFamily xmlns:thm15="http://schemas.microsoft.com/office/thememl/2012/main" name="Office Theme" id="{2E142A2C-CD16-42D6-873A-C26D2A0506FA}" vid="{1BDDFF52-6CD6-40A5-AB3C-68EB2F1E4D0A}"/>
+    </a:ext>
+  </a:extLst>
+</a:theme>
 </file>